--- a/docs/pptx/whole/ritu-linsubhr-disc-grade2.pptx
+++ b/docs/pptx/whole/ritu-linsubhr-disc-grade2.pptx
@@ -2443,7 +2443,7 @@
           </p:nvSpPr>
           <p:spPr>
             <a:xfrm>
-              <a:off x="1942521" y="2073503"/>
+              <a:off x="1943067" y="2073503"/>
               <a:ext cx="0" cy="3649639"/>
             </a:xfrm>
             <a:custGeom>
@@ -2486,7 +2486,7 @@
           </p:nvSpPr>
           <p:spPr>
             <a:xfrm>
-              <a:off x="4460699" y="2073503"/>
+              <a:off x="4460487" y="2073503"/>
               <a:ext cx="0" cy="3649639"/>
             </a:xfrm>
             <a:custGeom>
@@ -2529,7 +2529,7 @@
           </p:nvSpPr>
           <p:spPr>
             <a:xfrm>
-              <a:off x="6978877" y="2073503"/>
+              <a:off x="6977907" y="2073503"/>
               <a:ext cx="0" cy="3649639"/>
             </a:xfrm>
             <a:custGeom>
@@ -2787,7 +2787,7 @@
           </p:nvSpPr>
           <p:spPr>
             <a:xfrm>
-              <a:off x="3201610" y="2073503"/>
+              <a:off x="3201777" y="2073503"/>
               <a:ext cx="0" cy="3649639"/>
             </a:xfrm>
             <a:custGeom>
@@ -2830,7 +2830,7 @@
           </p:nvSpPr>
           <p:spPr>
             <a:xfrm>
-              <a:off x="5719788" y="2073503"/>
+              <a:off x="5719197" y="2073503"/>
               <a:ext cx="0" cy="3649639"/>
             </a:xfrm>
             <a:custGeom>
@@ -2873,7 +2873,7 @@
           </p:nvSpPr>
           <p:spPr>
             <a:xfrm>
-              <a:off x="8237966" y="2073503"/>
+              <a:off x="8236616" y="2073503"/>
               <a:ext cx="0" cy="3649639"/>
             </a:xfrm>
             <a:custGeom>
@@ -2917,593 +2917,587 @@
           <p:spPr>
             <a:xfrm>
               <a:off x="1172049" y="2073503"/>
-              <a:ext cx="7090630" cy="3132166"/>
+              <a:ext cx="7090630" cy="3138302"/>
             </a:xfrm>
             <a:custGeom>
               <a:avLst/>
               <a:pathLst>
-                <a:path w="7090630" h="3132166">
+                <a:path w="7090630" h="3138302">
                   <a:moveTo>
-                    <a:pt x="467429" y="0"/>
+                    <a:pt x="575180" y="0"/>
                   </a:moveTo>
                   <a:lnTo>
-                    <a:pt x="501357" y="40951"/>
-                  </a:lnTo>
-                  <a:lnTo>
-                    <a:pt x="572980" y="125282"/>
-                  </a:lnTo>
-                  <a:lnTo>
-                    <a:pt x="644602" y="207548"/>
-                  </a:lnTo>
-                  <a:lnTo>
-                    <a:pt x="716225" y="287798"/>
-                  </a:lnTo>
-                  <a:lnTo>
-                    <a:pt x="787847" y="366083"/>
-                  </a:lnTo>
-                  <a:lnTo>
-                    <a:pt x="859470" y="442450"/>
-                  </a:lnTo>
-                  <a:lnTo>
-                    <a:pt x="931092" y="516947"/>
-                  </a:lnTo>
-                  <a:lnTo>
-                    <a:pt x="1002715" y="589618"/>
-                  </a:lnTo>
-                  <a:lnTo>
-                    <a:pt x="1074337" y="660510"/>
-                  </a:lnTo>
-                  <a:lnTo>
-                    <a:pt x="1145960" y="729665"/>
-                  </a:lnTo>
-                  <a:lnTo>
-                    <a:pt x="1217582" y="797127"/>
-                  </a:lnTo>
-                  <a:lnTo>
-                    <a:pt x="1289205" y="862935"/>
-                  </a:lnTo>
-                  <a:lnTo>
-                    <a:pt x="1360827" y="927132"/>
-                  </a:lnTo>
-                  <a:lnTo>
-                    <a:pt x="1432450" y="989756"/>
-                  </a:lnTo>
-                  <a:lnTo>
-                    <a:pt x="1504073" y="1050847"/>
-                  </a:lnTo>
-                  <a:lnTo>
-                    <a:pt x="1575695" y="1110441"/>
-                  </a:lnTo>
-                  <a:lnTo>
-                    <a:pt x="1647318" y="1168575"/>
-                  </a:lnTo>
-                  <a:lnTo>
-                    <a:pt x="1718940" y="1225285"/>
-                  </a:lnTo>
-                  <a:lnTo>
-                    <a:pt x="1790563" y="1280606"/>
-                  </a:lnTo>
-                  <a:lnTo>
-                    <a:pt x="1862185" y="1334572"/>
-                  </a:lnTo>
-                  <a:lnTo>
-                    <a:pt x="1933808" y="1387216"/>
-                  </a:lnTo>
-                  <a:lnTo>
-                    <a:pt x="2005430" y="1438570"/>
-                  </a:lnTo>
-                  <a:lnTo>
-                    <a:pt x="2077053" y="1488667"/>
-                  </a:lnTo>
-                  <a:lnTo>
-                    <a:pt x="2148675" y="1537536"/>
-                  </a:lnTo>
-                  <a:lnTo>
-                    <a:pt x="2220298" y="1585209"/>
-                  </a:lnTo>
-                  <a:lnTo>
-                    <a:pt x="2291920" y="1631714"/>
-                  </a:lnTo>
-                  <a:lnTo>
-                    <a:pt x="2363543" y="1677079"/>
-                  </a:lnTo>
-                  <a:lnTo>
-                    <a:pt x="2435165" y="1721333"/>
-                  </a:lnTo>
-                  <a:lnTo>
-                    <a:pt x="2506788" y="1764504"/>
-                  </a:lnTo>
-                  <a:lnTo>
-                    <a:pt x="2578410" y="1806617"/>
-                  </a:lnTo>
-                  <a:lnTo>
-                    <a:pt x="2650033" y="1847698"/>
-                  </a:lnTo>
-                  <a:lnTo>
-                    <a:pt x="2721655" y="1887773"/>
-                  </a:lnTo>
-                  <a:lnTo>
-                    <a:pt x="2793278" y="1926866"/>
-                  </a:lnTo>
-                  <a:lnTo>
-                    <a:pt x="2864901" y="1965002"/>
-                  </a:lnTo>
-                  <a:lnTo>
-                    <a:pt x="2936523" y="2002204"/>
-                  </a:lnTo>
-                  <a:lnTo>
-                    <a:pt x="3008146" y="2038494"/>
-                  </a:lnTo>
-                  <a:lnTo>
-                    <a:pt x="3079768" y="2073896"/>
-                  </a:lnTo>
-                  <a:lnTo>
-                    <a:pt x="3151391" y="2108430"/>
-                  </a:lnTo>
-                  <a:lnTo>
-                    <a:pt x="3223013" y="2142118"/>
-                  </a:lnTo>
-                  <a:lnTo>
-                    <a:pt x="3294636" y="2174981"/>
-                  </a:lnTo>
-                  <a:lnTo>
-                    <a:pt x="3366258" y="2207040"/>
-                  </a:lnTo>
-                  <a:lnTo>
-                    <a:pt x="3437881" y="2238313"/>
-                  </a:lnTo>
-                  <a:lnTo>
-                    <a:pt x="3509503" y="2268820"/>
-                  </a:lnTo>
-                  <a:lnTo>
-                    <a:pt x="3581126" y="2298579"/>
-                  </a:lnTo>
-                  <a:lnTo>
-                    <a:pt x="3652748" y="2327610"/>
-                  </a:lnTo>
-                  <a:lnTo>
-                    <a:pt x="3724371" y="2355929"/>
-                  </a:lnTo>
-                  <a:lnTo>
-                    <a:pt x="3795993" y="2383555"/>
-                  </a:lnTo>
-                  <a:lnTo>
-                    <a:pt x="3867616" y="2410504"/>
-                  </a:lnTo>
-                  <a:lnTo>
-                    <a:pt x="3939238" y="2436794"/>
-                  </a:lnTo>
-                  <a:lnTo>
-                    <a:pt x="4010861" y="2462439"/>
-                  </a:lnTo>
-                  <a:lnTo>
-                    <a:pt x="4082483" y="2487456"/>
-                  </a:lnTo>
-                  <a:lnTo>
-                    <a:pt x="4154106" y="2511860"/>
-                  </a:lnTo>
-                  <a:lnTo>
-                    <a:pt x="4225729" y="2535666"/>
-                  </a:lnTo>
-                  <a:lnTo>
-                    <a:pt x="4297351" y="2558889"/>
-                  </a:lnTo>
-                  <a:lnTo>
-                    <a:pt x="4368974" y="2581544"/>
-                  </a:lnTo>
-                  <a:lnTo>
-                    <a:pt x="4440596" y="2603643"/>
-                  </a:lnTo>
-                  <a:lnTo>
-                    <a:pt x="4512219" y="2625201"/>
-                  </a:lnTo>
-                  <a:lnTo>
-                    <a:pt x="4583841" y="2646231"/>
-                  </a:lnTo>
-                  <a:lnTo>
-                    <a:pt x="4655464" y="2657990"/>
-                  </a:lnTo>
-                  <a:lnTo>
-                    <a:pt x="4727086" y="2664028"/>
-                  </a:lnTo>
-                  <a:lnTo>
-                    <a:pt x="4798709" y="2670021"/>
-                  </a:lnTo>
-                  <a:lnTo>
-                    <a:pt x="4870331" y="2675970"/>
-                  </a:lnTo>
-                  <a:lnTo>
-                    <a:pt x="4941954" y="2681876"/>
-                  </a:lnTo>
-                  <a:lnTo>
-                    <a:pt x="5013576" y="2687739"/>
-                  </a:lnTo>
-                  <a:lnTo>
-                    <a:pt x="5085199" y="2693558"/>
-                  </a:lnTo>
-                  <a:lnTo>
-                    <a:pt x="5156821" y="2699336"/>
-                  </a:lnTo>
-                  <a:lnTo>
-                    <a:pt x="5228444" y="2705071"/>
-                  </a:lnTo>
-                  <a:lnTo>
-                    <a:pt x="5300066" y="2710764"/>
-                  </a:lnTo>
-                  <a:lnTo>
-                    <a:pt x="5371689" y="2716415"/>
-                  </a:lnTo>
-                  <a:lnTo>
-                    <a:pt x="5443311" y="2722025"/>
-                  </a:lnTo>
-                  <a:lnTo>
-                    <a:pt x="5514934" y="2727594"/>
-                  </a:lnTo>
-                  <a:lnTo>
-                    <a:pt x="5586557" y="2733123"/>
-                  </a:lnTo>
-                  <a:lnTo>
-                    <a:pt x="5658179" y="2738611"/>
-                  </a:lnTo>
-                  <a:lnTo>
-                    <a:pt x="5729802" y="2744059"/>
-                  </a:lnTo>
-                  <a:lnTo>
-                    <a:pt x="5801424" y="2749467"/>
-                  </a:lnTo>
-                  <a:lnTo>
-                    <a:pt x="5873047" y="2754835"/>
-                  </a:lnTo>
-                  <a:lnTo>
-                    <a:pt x="5944669" y="2760164"/>
-                  </a:lnTo>
-                  <a:lnTo>
-                    <a:pt x="6016292" y="2765455"/>
-                  </a:lnTo>
-                  <a:lnTo>
-                    <a:pt x="6087914" y="2770706"/>
-                  </a:lnTo>
-                  <a:lnTo>
-                    <a:pt x="6159537" y="2775919"/>
-                  </a:lnTo>
-                  <a:lnTo>
-                    <a:pt x="6231159" y="2781095"/>
-                  </a:lnTo>
-                  <a:lnTo>
-                    <a:pt x="6302782" y="2786232"/>
-                  </a:lnTo>
-                  <a:lnTo>
-                    <a:pt x="6374404" y="2791331"/>
-                  </a:lnTo>
-                  <a:lnTo>
-                    <a:pt x="6446027" y="2796394"/>
-                  </a:lnTo>
-                  <a:lnTo>
-                    <a:pt x="6517649" y="2801419"/>
-                  </a:lnTo>
-                  <a:lnTo>
-                    <a:pt x="6589272" y="2806408"/>
-                  </a:lnTo>
-                  <a:lnTo>
-                    <a:pt x="6660894" y="2811360"/>
-                  </a:lnTo>
-                  <a:lnTo>
-                    <a:pt x="6732517" y="2816276"/>
-                  </a:lnTo>
-                  <a:lnTo>
-                    <a:pt x="6804139" y="2821156"/>
-                  </a:lnTo>
-                  <a:lnTo>
-                    <a:pt x="6875762" y="2826000"/>
-                  </a:lnTo>
-                  <a:lnTo>
-                    <a:pt x="6947385" y="2830809"/>
-                  </a:lnTo>
-                  <a:lnTo>
-                    <a:pt x="7019007" y="2835583"/>
-                  </a:lnTo>
-                  <a:lnTo>
-                    <a:pt x="7090630" y="2840322"/>
-                  </a:lnTo>
-                  <a:lnTo>
-                    <a:pt x="7090630" y="3132166"/>
-                  </a:lnTo>
-                  <a:lnTo>
-                    <a:pt x="7019007" y="3123337"/>
-                  </a:lnTo>
-                  <a:lnTo>
-                    <a:pt x="6947385" y="3114288"/>
-                  </a:lnTo>
-                  <a:lnTo>
-                    <a:pt x="6875762" y="3105010"/>
-                  </a:lnTo>
-                  <a:lnTo>
-                    <a:pt x="6804139" y="3095500"/>
-                  </a:lnTo>
-                  <a:lnTo>
-                    <a:pt x="6732517" y="3085751"/>
-                  </a:lnTo>
-                  <a:lnTo>
-                    <a:pt x="6660894" y="3075758"/>
-                  </a:lnTo>
-                  <a:lnTo>
-                    <a:pt x="6589272" y="3065513"/>
-                  </a:lnTo>
-                  <a:lnTo>
-                    <a:pt x="6517649" y="3055011"/>
-                  </a:lnTo>
-                  <a:lnTo>
-                    <a:pt x="6446027" y="3044246"/>
-                  </a:lnTo>
-                  <a:lnTo>
-                    <a:pt x="6374404" y="3033210"/>
-                  </a:lnTo>
-                  <a:lnTo>
-                    <a:pt x="6302782" y="3021897"/>
-                  </a:lnTo>
-                  <a:lnTo>
-                    <a:pt x="6231159" y="3010300"/>
-                  </a:lnTo>
-                  <a:lnTo>
-                    <a:pt x="6159537" y="2998411"/>
-                  </a:lnTo>
-                  <a:lnTo>
-                    <a:pt x="6087914" y="2986225"/>
-                  </a:lnTo>
-                  <a:lnTo>
-                    <a:pt x="6016292" y="2973732"/>
-                  </a:lnTo>
-                  <a:lnTo>
-                    <a:pt x="5944669" y="2960925"/>
-                  </a:lnTo>
-                  <a:lnTo>
-                    <a:pt x="5873047" y="2947797"/>
-                  </a:lnTo>
-                  <a:lnTo>
-                    <a:pt x="5801424" y="2934340"/>
-                  </a:lnTo>
-                  <a:lnTo>
-                    <a:pt x="5729802" y="2920544"/>
-                  </a:lnTo>
-                  <a:lnTo>
-                    <a:pt x="5658179" y="2906402"/>
-                  </a:lnTo>
-                  <a:lnTo>
-                    <a:pt x="5586557" y="2891905"/>
-                  </a:lnTo>
-                  <a:lnTo>
-                    <a:pt x="5514934" y="2877043"/>
-                  </a:lnTo>
-                  <a:lnTo>
-                    <a:pt x="5443311" y="2861809"/>
-                  </a:lnTo>
-                  <a:lnTo>
-                    <a:pt x="5371689" y="2846192"/>
-                  </a:lnTo>
-                  <a:lnTo>
-                    <a:pt x="5300066" y="2830183"/>
-                  </a:lnTo>
-                  <a:lnTo>
-                    <a:pt x="5228444" y="2813772"/>
-                  </a:lnTo>
-                  <a:lnTo>
-                    <a:pt x="5156821" y="2796949"/>
-                  </a:lnTo>
-                  <a:lnTo>
-                    <a:pt x="5085199" y="2779704"/>
-                  </a:lnTo>
-                  <a:lnTo>
-                    <a:pt x="5013576" y="2762025"/>
-                  </a:lnTo>
-                  <a:lnTo>
-                    <a:pt x="4941954" y="2743902"/>
-                  </a:lnTo>
-                  <a:lnTo>
-                    <a:pt x="4870331" y="2725325"/>
-                  </a:lnTo>
-                  <a:lnTo>
-                    <a:pt x="4798709" y="2706281"/>
-                  </a:lnTo>
-                  <a:lnTo>
-                    <a:pt x="4727086" y="2686759"/>
-                  </a:lnTo>
-                  <a:lnTo>
-                    <a:pt x="4655464" y="2666746"/>
-                  </a:lnTo>
-                  <a:lnTo>
-                    <a:pt x="4583841" y="2651909"/>
-                  </a:lnTo>
-                  <a:lnTo>
-                    <a:pt x="4512219" y="2645782"/>
-                  </a:lnTo>
-                  <a:lnTo>
-                    <a:pt x="4440596" y="2639610"/>
-                  </a:lnTo>
-                  <a:lnTo>
-                    <a:pt x="4368974" y="2633393"/>
-                  </a:lnTo>
-                  <a:lnTo>
-                    <a:pt x="4297351" y="2627130"/>
-                  </a:lnTo>
-                  <a:lnTo>
-                    <a:pt x="4225729" y="2620821"/>
-                  </a:lnTo>
-                  <a:lnTo>
-                    <a:pt x="4154106" y="2614466"/>
-                  </a:lnTo>
-                  <a:lnTo>
-                    <a:pt x="4082483" y="2608063"/>
-                  </a:lnTo>
-                  <a:lnTo>
-                    <a:pt x="4010861" y="2601614"/>
-                  </a:lnTo>
-                  <a:lnTo>
-                    <a:pt x="3939238" y="2595117"/>
-                  </a:lnTo>
-                  <a:lnTo>
-                    <a:pt x="3867616" y="2588572"/>
-                  </a:lnTo>
-                  <a:lnTo>
-                    <a:pt x="3795993" y="2581979"/>
-                  </a:lnTo>
-                  <a:lnTo>
-                    <a:pt x="3724371" y="2575338"/>
-                  </a:lnTo>
-                  <a:lnTo>
-                    <a:pt x="3652748" y="2568647"/>
-                  </a:lnTo>
-                  <a:lnTo>
-                    <a:pt x="3581126" y="2561907"/>
-                  </a:lnTo>
-                  <a:lnTo>
-                    <a:pt x="3509503" y="2555118"/>
-                  </a:lnTo>
-                  <a:lnTo>
-                    <a:pt x="3437881" y="2548278"/>
-                  </a:lnTo>
-                  <a:lnTo>
-                    <a:pt x="3366258" y="2541389"/>
-                  </a:lnTo>
-                  <a:lnTo>
-                    <a:pt x="3294636" y="2534448"/>
-                  </a:lnTo>
-                  <a:lnTo>
-                    <a:pt x="3223013" y="2527457"/>
-                  </a:lnTo>
-                  <a:lnTo>
-                    <a:pt x="3151391" y="2520413"/>
-                  </a:lnTo>
-                  <a:lnTo>
-                    <a:pt x="3079768" y="2513318"/>
-                  </a:lnTo>
-                  <a:lnTo>
-                    <a:pt x="3008146" y="2506171"/>
-                  </a:lnTo>
-                  <a:lnTo>
-                    <a:pt x="2936523" y="2498971"/>
-                  </a:lnTo>
-                  <a:lnTo>
-                    <a:pt x="2864901" y="2491718"/>
-                  </a:lnTo>
-                  <a:lnTo>
-                    <a:pt x="2793278" y="2484412"/>
-                  </a:lnTo>
-                  <a:lnTo>
-                    <a:pt x="2721655" y="2477052"/>
-                  </a:lnTo>
-                  <a:lnTo>
-                    <a:pt x="2650033" y="2469637"/>
-                  </a:lnTo>
-                  <a:lnTo>
-                    <a:pt x="2578410" y="2462168"/>
-                  </a:lnTo>
-                  <a:lnTo>
-                    <a:pt x="2506788" y="2454644"/>
-                  </a:lnTo>
-                  <a:lnTo>
-                    <a:pt x="2435165" y="2447065"/>
-                  </a:lnTo>
-                  <a:lnTo>
-                    <a:pt x="2363543" y="2439430"/>
-                  </a:lnTo>
-                  <a:lnTo>
-                    <a:pt x="2291920" y="2431738"/>
-                  </a:lnTo>
-                  <a:lnTo>
-                    <a:pt x="2220298" y="2423990"/>
-                  </a:lnTo>
-                  <a:lnTo>
-                    <a:pt x="2148675" y="2416185"/>
-                  </a:lnTo>
-                  <a:lnTo>
-                    <a:pt x="2077053" y="2408322"/>
-                  </a:lnTo>
-                  <a:lnTo>
-                    <a:pt x="2005430" y="2400402"/>
-                  </a:lnTo>
-                  <a:lnTo>
-                    <a:pt x="1933808" y="2392423"/>
-                  </a:lnTo>
-                  <a:lnTo>
-                    <a:pt x="1862185" y="2384385"/>
-                  </a:lnTo>
-                  <a:lnTo>
-                    <a:pt x="1790563" y="2376288"/>
-                  </a:lnTo>
-                  <a:lnTo>
-                    <a:pt x="1718940" y="2368132"/>
-                  </a:lnTo>
-                  <a:lnTo>
-                    <a:pt x="1647318" y="2359915"/>
-                  </a:lnTo>
-                  <a:lnTo>
-                    <a:pt x="1575695" y="2351638"/>
-                  </a:lnTo>
-                  <a:lnTo>
-                    <a:pt x="1504073" y="2343300"/>
-                  </a:lnTo>
-                  <a:lnTo>
-                    <a:pt x="1432450" y="2334900"/>
-                  </a:lnTo>
-                  <a:lnTo>
-                    <a:pt x="1360827" y="2326439"/>
-                  </a:lnTo>
-                  <a:lnTo>
-                    <a:pt x="1289205" y="2317915"/>
-                  </a:lnTo>
-                  <a:lnTo>
-                    <a:pt x="1217582" y="2309329"/>
-                  </a:lnTo>
-                  <a:lnTo>
-                    <a:pt x="1145960" y="2300679"/>
-                  </a:lnTo>
-                  <a:lnTo>
-                    <a:pt x="1074337" y="2291966"/>
-                  </a:lnTo>
-                  <a:lnTo>
-                    <a:pt x="1002715" y="2283188"/>
-                  </a:lnTo>
-                  <a:lnTo>
-                    <a:pt x="931092" y="2274346"/>
-                  </a:lnTo>
-                  <a:lnTo>
-                    <a:pt x="859470" y="2265439"/>
-                  </a:lnTo>
-                  <a:lnTo>
-                    <a:pt x="787847" y="2256466"/>
-                  </a:lnTo>
-                  <a:lnTo>
-                    <a:pt x="716225" y="2247427"/>
-                  </a:lnTo>
-                  <a:lnTo>
-                    <a:pt x="644602" y="2238321"/>
-                  </a:lnTo>
-                  <a:lnTo>
-                    <a:pt x="572980" y="2229149"/>
-                  </a:lnTo>
-                  <a:lnTo>
-                    <a:pt x="501357" y="2219908"/>
-                  </a:lnTo>
-                  <a:lnTo>
-                    <a:pt x="429735" y="2210600"/>
-                  </a:lnTo>
-                  <a:lnTo>
-                    <a:pt x="358112" y="2201223"/>
-                  </a:lnTo>
-                  <a:lnTo>
-                    <a:pt x="286490" y="2191778"/>
-                  </a:lnTo>
-                  <a:lnTo>
-                    <a:pt x="214867" y="2182262"/>
-                  </a:lnTo>
-                  <a:lnTo>
-                    <a:pt x="143245" y="2172677"/>
-                  </a:lnTo>
-                  <a:lnTo>
-                    <a:pt x="71622" y="2163020"/>
-                  </a:lnTo>
-                  <a:lnTo>
-                    <a:pt x="0" y="2153293"/>
+                    <a:pt x="644602" y="84767"/>
+                  </a:lnTo>
+                  <a:lnTo>
+                    <a:pt x="716225" y="170029"/>
+                  </a:lnTo>
+                  <a:lnTo>
+                    <a:pt x="787847" y="253152"/>
+                  </a:lnTo>
+                  <a:lnTo>
+                    <a:pt x="859470" y="334189"/>
+                  </a:lnTo>
+                  <a:lnTo>
+                    <a:pt x="931092" y="413194"/>
+                  </a:lnTo>
+                  <a:lnTo>
+                    <a:pt x="1002715" y="490217"/>
+                  </a:lnTo>
+                  <a:lnTo>
+                    <a:pt x="1074337" y="565308"/>
+                  </a:lnTo>
+                  <a:lnTo>
+                    <a:pt x="1145960" y="638516"/>
+                  </a:lnTo>
+                  <a:lnTo>
+                    <a:pt x="1217582" y="709887"/>
+                  </a:lnTo>
+                  <a:lnTo>
+                    <a:pt x="1289205" y="779467"/>
+                  </a:lnTo>
+                  <a:lnTo>
+                    <a:pt x="1360827" y="847303"/>
+                  </a:lnTo>
+                  <a:lnTo>
+                    <a:pt x="1432450" y="913436"/>
+                  </a:lnTo>
+                  <a:lnTo>
+                    <a:pt x="1504073" y="977911"/>
+                  </a:lnTo>
+                  <a:lnTo>
+                    <a:pt x="1575695" y="1040769"/>
+                  </a:lnTo>
+                  <a:lnTo>
+                    <a:pt x="1647318" y="1102049"/>
+                  </a:lnTo>
+                  <a:lnTo>
+                    <a:pt x="1718940" y="1161793"/>
+                  </a:lnTo>
+                  <a:lnTo>
+                    <a:pt x="1790563" y="1220038"/>
+                  </a:lnTo>
+                  <a:lnTo>
+                    <a:pt x="1862185" y="1276822"/>
+                  </a:lnTo>
+                  <a:lnTo>
+                    <a:pt x="1933808" y="1332181"/>
+                  </a:lnTo>
+                  <a:lnTo>
+                    <a:pt x="2005430" y="1386152"/>
+                  </a:lnTo>
+                  <a:lnTo>
+                    <a:pt x="2077053" y="1438769"/>
+                  </a:lnTo>
+                  <a:lnTo>
+                    <a:pt x="2148675" y="1490066"/>
+                  </a:lnTo>
+                  <a:lnTo>
+                    <a:pt x="2220298" y="1540076"/>
+                  </a:lnTo>
+                  <a:lnTo>
+                    <a:pt x="2291920" y="1588832"/>
+                  </a:lnTo>
+                  <a:lnTo>
+                    <a:pt x="2363543" y="1636365"/>
+                  </a:lnTo>
+                  <a:lnTo>
+                    <a:pt x="2435165" y="1682706"/>
+                  </a:lnTo>
+                  <a:lnTo>
+                    <a:pt x="2506788" y="1727884"/>
+                  </a:lnTo>
+                  <a:lnTo>
+                    <a:pt x="2578410" y="1771928"/>
+                  </a:lnTo>
+                  <a:lnTo>
+                    <a:pt x="2650033" y="1814868"/>
+                  </a:lnTo>
+                  <a:lnTo>
+                    <a:pt x="2721655" y="1856731"/>
+                  </a:lnTo>
+                  <a:lnTo>
+                    <a:pt x="2793278" y="1897544"/>
+                  </a:lnTo>
+                  <a:lnTo>
+                    <a:pt x="2864901" y="1937333"/>
+                  </a:lnTo>
+                  <a:lnTo>
+                    <a:pt x="2936523" y="1976124"/>
+                  </a:lnTo>
+                  <a:lnTo>
+                    <a:pt x="3008146" y="2013942"/>
+                  </a:lnTo>
+                  <a:lnTo>
+                    <a:pt x="3079768" y="2050811"/>
+                  </a:lnTo>
+                  <a:lnTo>
+                    <a:pt x="3151391" y="2086755"/>
+                  </a:lnTo>
+                  <a:lnTo>
+                    <a:pt x="3223013" y="2121798"/>
+                  </a:lnTo>
+                  <a:lnTo>
+                    <a:pt x="3294636" y="2155962"/>
+                  </a:lnTo>
+                  <a:lnTo>
+                    <a:pt x="3366258" y="2189269"/>
+                  </a:lnTo>
+                  <a:lnTo>
+                    <a:pt x="3437881" y="2221740"/>
+                  </a:lnTo>
+                  <a:lnTo>
+                    <a:pt x="3509503" y="2253397"/>
+                  </a:lnTo>
+                  <a:lnTo>
+                    <a:pt x="3581126" y="2284259"/>
+                  </a:lnTo>
+                  <a:lnTo>
+                    <a:pt x="3652748" y="2314348"/>
+                  </a:lnTo>
+                  <a:lnTo>
+                    <a:pt x="3724371" y="2343681"/>
+                  </a:lnTo>
+                  <a:lnTo>
+                    <a:pt x="3795993" y="2372279"/>
+                  </a:lnTo>
+                  <a:lnTo>
+                    <a:pt x="3867616" y="2400160"/>
+                  </a:lnTo>
+                  <a:lnTo>
+                    <a:pt x="3939238" y="2427341"/>
+                  </a:lnTo>
+                  <a:lnTo>
+                    <a:pt x="4010861" y="2453840"/>
+                  </a:lnTo>
+                  <a:lnTo>
+                    <a:pt x="4082483" y="2479675"/>
+                  </a:lnTo>
+                  <a:lnTo>
+                    <a:pt x="4154106" y="2504861"/>
+                  </a:lnTo>
+                  <a:lnTo>
+                    <a:pt x="4225729" y="2529416"/>
+                  </a:lnTo>
+                  <a:lnTo>
+                    <a:pt x="4297351" y="2553355"/>
+                  </a:lnTo>
+                  <a:lnTo>
+                    <a:pt x="4368974" y="2576693"/>
+                  </a:lnTo>
+                  <a:lnTo>
+                    <a:pt x="4440596" y="2599446"/>
+                  </a:lnTo>
+                  <a:lnTo>
+                    <a:pt x="4512219" y="2621629"/>
+                  </a:lnTo>
+                  <a:lnTo>
+                    <a:pt x="4583841" y="2643254"/>
+                  </a:lnTo>
+                  <a:lnTo>
+                    <a:pt x="4655464" y="2657414"/>
+                  </a:lnTo>
+                  <a:lnTo>
+                    <a:pt x="4727086" y="2663897"/>
+                  </a:lnTo>
+                  <a:lnTo>
+                    <a:pt x="4798709" y="2670330"/>
+                  </a:lnTo>
+                  <a:lnTo>
+                    <a:pt x="4870331" y="2676713"/>
+                  </a:lnTo>
+                  <a:lnTo>
+                    <a:pt x="4941954" y="2683045"/>
+                  </a:lnTo>
+                  <a:lnTo>
+                    <a:pt x="5013576" y="2689328"/>
+                  </a:lnTo>
+                  <a:lnTo>
+                    <a:pt x="5085199" y="2695561"/>
+                  </a:lnTo>
+                  <a:lnTo>
+                    <a:pt x="5156821" y="2701745"/>
+                  </a:lnTo>
+                  <a:lnTo>
+                    <a:pt x="5228444" y="2707881"/>
+                  </a:lnTo>
+                  <a:lnTo>
+                    <a:pt x="5300066" y="2713969"/>
+                  </a:lnTo>
+                  <a:lnTo>
+                    <a:pt x="5371689" y="2720009"/>
+                  </a:lnTo>
+                  <a:lnTo>
+                    <a:pt x="5443311" y="2726002"/>
+                  </a:lnTo>
+                  <a:lnTo>
+                    <a:pt x="5514934" y="2731947"/>
+                  </a:lnTo>
+                  <a:lnTo>
+                    <a:pt x="5586557" y="2737846"/>
+                  </a:lnTo>
+                  <a:lnTo>
+                    <a:pt x="5658179" y="2743699"/>
+                  </a:lnTo>
+                  <a:lnTo>
+                    <a:pt x="5729802" y="2749505"/>
+                  </a:lnTo>
+                  <a:lnTo>
+                    <a:pt x="5801424" y="2755267"/>
+                  </a:lnTo>
+                  <a:lnTo>
+                    <a:pt x="5873047" y="2760983"/>
+                  </a:lnTo>
+                  <a:lnTo>
+                    <a:pt x="5944669" y="2766654"/>
+                  </a:lnTo>
+                  <a:lnTo>
+                    <a:pt x="6016292" y="2772280"/>
+                  </a:lnTo>
+                  <a:lnTo>
+                    <a:pt x="6087914" y="2777863"/>
+                  </a:lnTo>
+                  <a:lnTo>
+                    <a:pt x="6159537" y="2783401"/>
+                  </a:lnTo>
+                  <a:lnTo>
+                    <a:pt x="6231159" y="2788897"/>
+                  </a:lnTo>
+                  <a:lnTo>
+                    <a:pt x="6302782" y="2794349"/>
+                  </a:lnTo>
+                  <a:lnTo>
+                    <a:pt x="6374404" y="2799758"/>
+                  </a:lnTo>
+                  <a:lnTo>
+                    <a:pt x="6446027" y="2805125"/>
+                  </a:lnTo>
+                  <a:lnTo>
+                    <a:pt x="6517649" y="2810450"/>
+                  </a:lnTo>
+                  <a:lnTo>
+                    <a:pt x="6589272" y="2815732"/>
+                  </a:lnTo>
+                  <a:lnTo>
+                    <a:pt x="6660894" y="2820974"/>
+                  </a:lnTo>
+                  <a:lnTo>
+                    <a:pt x="6732517" y="2826174"/>
+                  </a:lnTo>
+                  <a:lnTo>
+                    <a:pt x="6804139" y="2831334"/>
+                  </a:lnTo>
+                  <a:lnTo>
+                    <a:pt x="6875762" y="2836453"/>
+                  </a:lnTo>
+                  <a:lnTo>
+                    <a:pt x="6947385" y="2841532"/>
+                  </a:lnTo>
+                  <a:lnTo>
+                    <a:pt x="7019007" y="2846571"/>
+                  </a:lnTo>
+                  <a:lnTo>
+                    <a:pt x="7090630" y="2851571"/>
+                  </a:lnTo>
+                  <a:lnTo>
+                    <a:pt x="7090630" y="3138302"/>
+                  </a:lnTo>
+                  <a:lnTo>
+                    <a:pt x="7019007" y="3129413"/>
+                  </a:lnTo>
+                  <a:lnTo>
+                    <a:pt x="6947385" y="3120296"/>
+                  </a:lnTo>
+                  <a:lnTo>
+                    <a:pt x="6875762" y="3110945"/>
+                  </a:lnTo>
+                  <a:lnTo>
+                    <a:pt x="6804139" y="3101353"/>
+                  </a:lnTo>
+                  <a:lnTo>
+                    <a:pt x="6732517" y="3091514"/>
+                  </a:lnTo>
+                  <a:lnTo>
+                    <a:pt x="6660894" y="3081422"/>
+                  </a:lnTo>
+                  <a:lnTo>
+                    <a:pt x="6589272" y="3071070"/>
+                  </a:lnTo>
+                  <a:lnTo>
+                    <a:pt x="6517649" y="3060452"/>
+                  </a:lnTo>
+                  <a:lnTo>
+                    <a:pt x="6446027" y="3049560"/>
+                  </a:lnTo>
+                  <a:lnTo>
+                    <a:pt x="6374404" y="3038389"/>
+                  </a:lnTo>
+                  <a:lnTo>
+                    <a:pt x="6302782" y="3026930"/>
+                  </a:lnTo>
+                  <a:lnTo>
+                    <a:pt x="6231159" y="3015176"/>
+                  </a:lnTo>
+                  <a:lnTo>
+                    <a:pt x="6159537" y="3003120"/>
+                  </a:lnTo>
+                  <a:lnTo>
+                    <a:pt x="6087914" y="2990753"/>
+                  </a:lnTo>
+                  <a:lnTo>
+                    <a:pt x="6016292" y="2978069"/>
+                  </a:lnTo>
+                  <a:lnTo>
+                    <a:pt x="5944669" y="2965058"/>
+                  </a:lnTo>
+                  <a:lnTo>
+                    <a:pt x="5873047" y="2951712"/>
+                  </a:lnTo>
+                  <a:lnTo>
+                    <a:pt x="5801424" y="2938023"/>
+                  </a:lnTo>
+                  <a:lnTo>
+                    <a:pt x="5729802" y="2923981"/>
+                  </a:lnTo>
+                  <a:lnTo>
+                    <a:pt x="5658179" y="2909579"/>
+                  </a:lnTo>
+                  <a:lnTo>
+                    <a:pt x="5586557" y="2894806"/>
+                  </a:lnTo>
+                  <a:lnTo>
+                    <a:pt x="5514934" y="2879652"/>
+                  </a:lnTo>
+                  <a:lnTo>
+                    <a:pt x="5443311" y="2864109"/>
+                  </a:lnTo>
+                  <a:lnTo>
+                    <a:pt x="5371689" y="2848166"/>
+                  </a:lnTo>
+                  <a:lnTo>
+                    <a:pt x="5300066" y="2831812"/>
+                  </a:lnTo>
+                  <a:lnTo>
+                    <a:pt x="5228444" y="2815038"/>
+                  </a:lnTo>
+                  <a:lnTo>
+                    <a:pt x="5156821" y="2797832"/>
+                  </a:lnTo>
+                  <a:lnTo>
+                    <a:pt x="5085199" y="2780184"/>
+                  </a:lnTo>
+                  <a:lnTo>
+                    <a:pt x="5013576" y="2762081"/>
+                  </a:lnTo>
+                  <a:lnTo>
+                    <a:pt x="4941954" y="2743513"/>
+                  </a:lnTo>
+                  <a:lnTo>
+                    <a:pt x="4870331" y="2724467"/>
+                  </a:lnTo>
+                  <a:lnTo>
+                    <a:pt x="4798709" y="2704931"/>
+                  </a:lnTo>
+                  <a:lnTo>
+                    <a:pt x="4727086" y="2684892"/>
+                  </a:lnTo>
+                  <a:lnTo>
+                    <a:pt x="4655464" y="2664338"/>
+                  </a:lnTo>
+                  <a:lnTo>
+                    <a:pt x="4583841" y="2650879"/>
+                  </a:lnTo>
+                  <a:lnTo>
+                    <a:pt x="4512219" y="2644292"/>
+                  </a:lnTo>
+                  <a:lnTo>
+                    <a:pt x="4440596" y="2637653"/>
+                  </a:lnTo>
+                  <a:lnTo>
+                    <a:pt x="4368974" y="2630962"/>
+                  </a:lnTo>
+                  <a:lnTo>
+                    <a:pt x="4297351" y="2624218"/>
+                  </a:lnTo>
+                  <a:lnTo>
+                    <a:pt x="4225729" y="2617420"/>
+                  </a:lnTo>
+                  <a:lnTo>
+                    <a:pt x="4154106" y="2610569"/>
+                  </a:lnTo>
+                  <a:lnTo>
+                    <a:pt x="4082483" y="2603663"/>
+                  </a:lnTo>
+                  <a:lnTo>
+                    <a:pt x="4010861" y="2596703"/>
+                  </a:lnTo>
+                  <a:lnTo>
+                    <a:pt x="3939238" y="2589688"/>
+                  </a:lnTo>
+                  <a:lnTo>
+                    <a:pt x="3867616" y="2582618"/>
+                  </a:lnTo>
+                  <a:lnTo>
+                    <a:pt x="3795993" y="2575491"/>
+                  </a:lnTo>
+                  <a:lnTo>
+                    <a:pt x="3724371" y="2568308"/>
+                  </a:lnTo>
+                  <a:lnTo>
+                    <a:pt x="3652748" y="2561068"/>
+                  </a:lnTo>
+                  <a:lnTo>
+                    <a:pt x="3581126" y="2553771"/>
+                  </a:lnTo>
+                  <a:lnTo>
+                    <a:pt x="3509503" y="2546417"/>
+                  </a:lnTo>
+                  <a:lnTo>
+                    <a:pt x="3437881" y="2539004"/>
+                  </a:lnTo>
+                  <a:lnTo>
+                    <a:pt x="3366258" y="2531532"/>
+                  </a:lnTo>
+                  <a:lnTo>
+                    <a:pt x="3294636" y="2524002"/>
+                  </a:lnTo>
+                  <a:lnTo>
+                    <a:pt x="3223013" y="2516412"/>
+                  </a:lnTo>
+                  <a:lnTo>
+                    <a:pt x="3151391" y="2508762"/>
+                  </a:lnTo>
+                  <a:lnTo>
+                    <a:pt x="3079768" y="2501051"/>
+                  </a:lnTo>
+                  <a:lnTo>
+                    <a:pt x="3008146" y="2493279"/>
+                  </a:lnTo>
+                  <a:lnTo>
+                    <a:pt x="2936523" y="2485446"/>
+                  </a:lnTo>
+                  <a:lnTo>
+                    <a:pt x="2864901" y="2477551"/>
+                  </a:lnTo>
+                  <a:lnTo>
+                    <a:pt x="2793278" y="2469594"/>
+                  </a:lnTo>
+                  <a:lnTo>
+                    <a:pt x="2721655" y="2461574"/>
+                  </a:lnTo>
+                  <a:lnTo>
+                    <a:pt x="2650033" y="2453490"/>
+                  </a:lnTo>
+                  <a:lnTo>
+                    <a:pt x="2578410" y="2445342"/>
+                  </a:lnTo>
+                  <a:lnTo>
+                    <a:pt x="2506788" y="2437130"/>
+                  </a:lnTo>
+                  <a:lnTo>
+                    <a:pt x="2435165" y="2428853"/>
+                  </a:lnTo>
+                  <a:lnTo>
+                    <a:pt x="2363543" y="2420510"/>
+                  </a:lnTo>
+                  <a:lnTo>
+                    <a:pt x="2291920" y="2412102"/>
+                  </a:lnTo>
+                  <a:lnTo>
+                    <a:pt x="2220298" y="2403626"/>
+                  </a:lnTo>
+                  <a:lnTo>
+                    <a:pt x="2148675" y="2395084"/>
+                  </a:lnTo>
+                  <a:lnTo>
+                    <a:pt x="2077053" y="2386475"/>
+                  </a:lnTo>
+                  <a:lnTo>
+                    <a:pt x="2005430" y="2377797"/>
+                  </a:lnTo>
+                  <a:lnTo>
+                    <a:pt x="1933808" y="2369051"/>
+                  </a:lnTo>
+                  <a:lnTo>
+                    <a:pt x="1862185" y="2360235"/>
+                  </a:lnTo>
+                  <a:lnTo>
+                    <a:pt x="1790563" y="2351350"/>
+                  </a:lnTo>
+                  <a:lnTo>
+                    <a:pt x="1718940" y="2342394"/>
+                  </a:lnTo>
+                  <a:lnTo>
+                    <a:pt x="1647318" y="2333368"/>
+                  </a:lnTo>
+                  <a:lnTo>
+                    <a:pt x="1575695" y="2324270"/>
+                  </a:lnTo>
+                  <a:lnTo>
+                    <a:pt x="1504073" y="2315101"/>
+                  </a:lnTo>
+                  <a:lnTo>
+                    <a:pt x="1432450" y="2305858"/>
+                  </a:lnTo>
+                  <a:lnTo>
+                    <a:pt x="1360827" y="2296543"/>
+                  </a:lnTo>
+                  <a:lnTo>
+                    <a:pt x="1289205" y="2287154"/>
+                  </a:lnTo>
+                  <a:lnTo>
+                    <a:pt x="1217582" y="2277691"/>
+                  </a:lnTo>
+                  <a:lnTo>
+                    <a:pt x="1145960" y="2268153"/>
+                  </a:lnTo>
+                  <a:lnTo>
+                    <a:pt x="1074337" y="2258540"/>
+                  </a:lnTo>
+                  <a:lnTo>
+                    <a:pt x="1002715" y="2248850"/>
+                  </a:lnTo>
+                  <a:lnTo>
+                    <a:pt x="931092" y="2239084"/>
+                  </a:lnTo>
+                  <a:lnTo>
+                    <a:pt x="859470" y="2229241"/>
+                  </a:lnTo>
+                  <a:lnTo>
+                    <a:pt x="787847" y="2219319"/>
+                  </a:lnTo>
+                  <a:lnTo>
+                    <a:pt x="716225" y="2209320"/>
+                  </a:lnTo>
+                  <a:lnTo>
+                    <a:pt x="644602" y="2199241"/>
+                  </a:lnTo>
+                  <a:lnTo>
+                    <a:pt x="572980" y="2189082"/>
+                  </a:lnTo>
+                  <a:lnTo>
+                    <a:pt x="501357" y="2178844"/>
+                  </a:lnTo>
+                  <a:lnTo>
+                    <a:pt x="429735" y="2168524"/>
+                  </a:lnTo>
+                  <a:lnTo>
+                    <a:pt x="358112" y="2158123"/>
+                  </a:lnTo>
+                  <a:lnTo>
+                    <a:pt x="286490" y="2147639"/>
+                  </a:lnTo>
+                  <a:lnTo>
+                    <a:pt x="214867" y="2137072"/>
+                  </a:lnTo>
+                  <a:lnTo>
+                    <a:pt x="143245" y="2126422"/>
+                  </a:lnTo>
+                  <a:lnTo>
+                    <a:pt x="71622" y="2115688"/>
+                  </a:lnTo>
+                  <a:lnTo>
+                    <a:pt x="0" y="2104869"/>
                   </a:lnTo>
                   <a:close/>
                 </a:path>
@@ -3529,294 +3523,288 @@
           </p:nvSpPr>
           <p:spPr>
             <a:xfrm>
-              <a:off x="1639479" y="2073503"/>
-              <a:ext cx="6623200" cy="2840322"/>
+              <a:off x="1747230" y="2073503"/>
+              <a:ext cx="6515449" cy="2851571"/>
             </a:xfrm>
             <a:custGeom>
               <a:avLst/>
               <a:pathLst>
-                <a:path w="6623200" h="2840322">
+                <a:path w="6515449" h="2851571">
                   <a:moveTo>
                     <a:pt x="0" y="0"/>
                   </a:moveTo>
                   <a:lnTo>
-                    <a:pt x="33927" y="40951"/>
-                  </a:lnTo>
-                  <a:lnTo>
-                    <a:pt x="105550" y="125282"/>
-                  </a:lnTo>
-                  <a:lnTo>
-                    <a:pt x="177173" y="207548"/>
-                  </a:lnTo>
-                  <a:lnTo>
-                    <a:pt x="248795" y="287798"/>
-                  </a:lnTo>
-                  <a:lnTo>
-                    <a:pt x="320418" y="366083"/>
-                  </a:lnTo>
-                  <a:lnTo>
-                    <a:pt x="392040" y="442450"/>
-                  </a:lnTo>
-                  <a:lnTo>
-                    <a:pt x="463663" y="516947"/>
-                  </a:lnTo>
-                  <a:lnTo>
-                    <a:pt x="535285" y="589618"/>
-                  </a:lnTo>
-                  <a:lnTo>
-                    <a:pt x="606908" y="660510"/>
-                  </a:lnTo>
-                  <a:lnTo>
-                    <a:pt x="678530" y="729665"/>
-                  </a:lnTo>
-                  <a:lnTo>
-                    <a:pt x="750153" y="797127"/>
-                  </a:lnTo>
-                  <a:lnTo>
-                    <a:pt x="821775" y="862935"/>
-                  </a:lnTo>
-                  <a:lnTo>
-                    <a:pt x="893398" y="927132"/>
-                  </a:lnTo>
-                  <a:lnTo>
-                    <a:pt x="965020" y="989756"/>
-                  </a:lnTo>
-                  <a:lnTo>
-                    <a:pt x="1036643" y="1050847"/>
-                  </a:lnTo>
-                  <a:lnTo>
-                    <a:pt x="1108265" y="1110441"/>
-                  </a:lnTo>
-                  <a:lnTo>
-                    <a:pt x="1179888" y="1168575"/>
-                  </a:lnTo>
-                  <a:lnTo>
-                    <a:pt x="1251510" y="1225285"/>
-                  </a:lnTo>
-                  <a:lnTo>
-                    <a:pt x="1323133" y="1280606"/>
-                  </a:lnTo>
-                  <a:lnTo>
-                    <a:pt x="1394755" y="1334572"/>
-                  </a:lnTo>
-                  <a:lnTo>
-                    <a:pt x="1466378" y="1387216"/>
-                  </a:lnTo>
-                  <a:lnTo>
-                    <a:pt x="1538001" y="1438570"/>
-                  </a:lnTo>
-                  <a:lnTo>
-                    <a:pt x="1609623" y="1488667"/>
-                  </a:lnTo>
-                  <a:lnTo>
-                    <a:pt x="1681246" y="1537536"/>
-                  </a:lnTo>
-                  <a:lnTo>
-                    <a:pt x="1752868" y="1585209"/>
-                  </a:lnTo>
-                  <a:lnTo>
-                    <a:pt x="1824491" y="1631714"/>
-                  </a:lnTo>
-                  <a:lnTo>
-                    <a:pt x="1896113" y="1677079"/>
-                  </a:lnTo>
-                  <a:lnTo>
-                    <a:pt x="1967736" y="1721333"/>
-                  </a:lnTo>
-                  <a:lnTo>
-                    <a:pt x="2039358" y="1764504"/>
-                  </a:lnTo>
-                  <a:lnTo>
-                    <a:pt x="2110981" y="1806617"/>
-                  </a:lnTo>
-                  <a:lnTo>
-                    <a:pt x="2182603" y="1847698"/>
-                  </a:lnTo>
-                  <a:lnTo>
-                    <a:pt x="2254226" y="1887773"/>
-                  </a:lnTo>
-                  <a:lnTo>
-                    <a:pt x="2325848" y="1926866"/>
-                  </a:lnTo>
-                  <a:lnTo>
-                    <a:pt x="2397471" y="1965002"/>
-                  </a:lnTo>
-                  <a:lnTo>
-                    <a:pt x="2469093" y="2002204"/>
-                  </a:lnTo>
-                  <a:lnTo>
-                    <a:pt x="2540716" y="2038494"/>
-                  </a:lnTo>
-                  <a:lnTo>
-                    <a:pt x="2612338" y="2073896"/>
-                  </a:lnTo>
-                  <a:lnTo>
-                    <a:pt x="2683961" y="2108430"/>
-                  </a:lnTo>
-                  <a:lnTo>
-                    <a:pt x="2755583" y="2142118"/>
-                  </a:lnTo>
-                  <a:lnTo>
-                    <a:pt x="2827206" y="2174981"/>
-                  </a:lnTo>
-                  <a:lnTo>
-                    <a:pt x="2898829" y="2207040"/>
-                  </a:lnTo>
-                  <a:lnTo>
-                    <a:pt x="2970451" y="2238313"/>
-                  </a:lnTo>
-                  <a:lnTo>
-                    <a:pt x="3042074" y="2268820"/>
-                  </a:lnTo>
-                  <a:lnTo>
-                    <a:pt x="3113696" y="2298579"/>
-                  </a:lnTo>
-                  <a:lnTo>
-                    <a:pt x="3185319" y="2327610"/>
-                  </a:lnTo>
-                  <a:lnTo>
-                    <a:pt x="3256941" y="2355929"/>
-                  </a:lnTo>
-                  <a:lnTo>
-                    <a:pt x="3328564" y="2383555"/>
-                  </a:lnTo>
-                  <a:lnTo>
-                    <a:pt x="3400186" y="2410504"/>
-                  </a:lnTo>
-                  <a:lnTo>
-                    <a:pt x="3471809" y="2436794"/>
-                  </a:lnTo>
-                  <a:lnTo>
-                    <a:pt x="3543431" y="2462439"/>
-                  </a:lnTo>
-                  <a:lnTo>
-                    <a:pt x="3615054" y="2487456"/>
-                  </a:lnTo>
-                  <a:lnTo>
-                    <a:pt x="3686676" y="2511860"/>
-                  </a:lnTo>
-                  <a:lnTo>
-                    <a:pt x="3758299" y="2535666"/>
-                  </a:lnTo>
-                  <a:lnTo>
-                    <a:pt x="3829921" y="2558889"/>
-                  </a:lnTo>
-                  <a:lnTo>
-                    <a:pt x="3901544" y="2581544"/>
-                  </a:lnTo>
-                  <a:lnTo>
-                    <a:pt x="3973166" y="2603643"/>
-                  </a:lnTo>
-                  <a:lnTo>
-                    <a:pt x="4044789" y="2625201"/>
-                  </a:lnTo>
-                  <a:lnTo>
-                    <a:pt x="4116411" y="2646231"/>
-                  </a:lnTo>
-                  <a:lnTo>
-                    <a:pt x="4188034" y="2657990"/>
-                  </a:lnTo>
-                  <a:lnTo>
-                    <a:pt x="4259657" y="2664028"/>
-                  </a:lnTo>
-                  <a:lnTo>
-                    <a:pt x="4331279" y="2670021"/>
-                  </a:lnTo>
-                  <a:lnTo>
-                    <a:pt x="4402902" y="2675970"/>
-                  </a:lnTo>
-                  <a:lnTo>
-                    <a:pt x="4474524" y="2681876"/>
-                  </a:lnTo>
-                  <a:lnTo>
-                    <a:pt x="4546147" y="2687739"/>
-                  </a:lnTo>
-                  <a:lnTo>
-                    <a:pt x="4617769" y="2693558"/>
-                  </a:lnTo>
-                  <a:lnTo>
-                    <a:pt x="4689392" y="2699336"/>
-                  </a:lnTo>
-                  <a:lnTo>
-                    <a:pt x="4761014" y="2705071"/>
-                  </a:lnTo>
-                  <a:lnTo>
-                    <a:pt x="4832637" y="2710764"/>
-                  </a:lnTo>
-                  <a:lnTo>
-                    <a:pt x="4904259" y="2716415"/>
-                  </a:lnTo>
-                  <a:lnTo>
-                    <a:pt x="4975882" y="2722025"/>
-                  </a:lnTo>
-                  <a:lnTo>
-                    <a:pt x="5047504" y="2727594"/>
-                  </a:lnTo>
-                  <a:lnTo>
-                    <a:pt x="5119127" y="2733123"/>
-                  </a:lnTo>
-                  <a:lnTo>
-                    <a:pt x="5190749" y="2738611"/>
-                  </a:lnTo>
-                  <a:lnTo>
-                    <a:pt x="5262372" y="2744059"/>
-                  </a:lnTo>
-                  <a:lnTo>
-                    <a:pt x="5333994" y="2749467"/>
-                  </a:lnTo>
-                  <a:lnTo>
-                    <a:pt x="5405617" y="2754835"/>
-                  </a:lnTo>
-                  <a:lnTo>
-                    <a:pt x="5477239" y="2760164"/>
-                  </a:lnTo>
-                  <a:lnTo>
-                    <a:pt x="5548862" y="2765455"/>
-                  </a:lnTo>
-                  <a:lnTo>
-                    <a:pt x="5620485" y="2770706"/>
-                  </a:lnTo>
-                  <a:lnTo>
-                    <a:pt x="5692107" y="2775919"/>
-                  </a:lnTo>
-                  <a:lnTo>
-                    <a:pt x="5763730" y="2781095"/>
-                  </a:lnTo>
-                  <a:lnTo>
-                    <a:pt x="5835352" y="2786232"/>
-                  </a:lnTo>
-                  <a:lnTo>
-                    <a:pt x="5906975" y="2791331"/>
-                  </a:lnTo>
-                  <a:lnTo>
-                    <a:pt x="5978597" y="2796394"/>
-                  </a:lnTo>
-                  <a:lnTo>
-                    <a:pt x="6050220" y="2801419"/>
-                  </a:lnTo>
-                  <a:lnTo>
-                    <a:pt x="6121842" y="2806408"/>
-                  </a:lnTo>
-                  <a:lnTo>
-                    <a:pt x="6193465" y="2811360"/>
-                  </a:lnTo>
-                  <a:lnTo>
-                    <a:pt x="6265087" y="2816276"/>
-                  </a:lnTo>
-                  <a:lnTo>
-                    <a:pt x="6336710" y="2821156"/>
-                  </a:lnTo>
-                  <a:lnTo>
-                    <a:pt x="6408332" y="2826000"/>
-                  </a:lnTo>
-                  <a:lnTo>
-                    <a:pt x="6479955" y="2830809"/>
-                  </a:lnTo>
-                  <a:lnTo>
-                    <a:pt x="6551577" y="2835583"/>
-                  </a:lnTo>
-                  <a:lnTo>
-                    <a:pt x="6623200" y="2840322"/>
+                    <a:pt x="69421" y="84767"/>
+                  </a:lnTo>
+                  <a:lnTo>
+                    <a:pt x="141044" y="170029"/>
+                  </a:lnTo>
+                  <a:lnTo>
+                    <a:pt x="212666" y="253152"/>
+                  </a:lnTo>
+                  <a:lnTo>
+                    <a:pt x="284289" y="334189"/>
+                  </a:lnTo>
+                  <a:lnTo>
+                    <a:pt x="355911" y="413194"/>
+                  </a:lnTo>
+                  <a:lnTo>
+                    <a:pt x="427534" y="490217"/>
+                  </a:lnTo>
+                  <a:lnTo>
+                    <a:pt x="499156" y="565308"/>
+                  </a:lnTo>
+                  <a:lnTo>
+                    <a:pt x="570779" y="638516"/>
+                  </a:lnTo>
+                  <a:lnTo>
+                    <a:pt x="642401" y="709887"/>
+                  </a:lnTo>
+                  <a:lnTo>
+                    <a:pt x="714024" y="779467"/>
+                  </a:lnTo>
+                  <a:lnTo>
+                    <a:pt x="785647" y="847303"/>
+                  </a:lnTo>
+                  <a:lnTo>
+                    <a:pt x="857269" y="913436"/>
+                  </a:lnTo>
+                  <a:lnTo>
+                    <a:pt x="928892" y="977911"/>
+                  </a:lnTo>
+                  <a:lnTo>
+                    <a:pt x="1000514" y="1040769"/>
+                  </a:lnTo>
+                  <a:lnTo>
+                    <a:pt x="1072137" y="1102049"/>
+                  </a:lnTo>
+                  <a:lnTo>
+                    <a:pt x="1143759" y="1161793"/>
+                  </a:lnTo>
+                  <a:lnTo>
+                    <a:pt x="1215382" y="1220038"/>
+                  </a:lnTo>
+                  <a:lnTo>
+                    <a:pt x="1287004" y="1276822"/>
+                  </a:lnTo>
+                  <a:lnTo>
+                    <a:pt x="1358627" y="1332181"/>
+                  </a:lnTo>
+                  <a:lnTo>
+                    <a:pt x="1430249" y="1386152"/>
+                  </a:lnTo>
+                  <a:lnTo>
+                    <a:pt x="1501872" y="1438769"/>
+                  </a:lnTo>
+                  <a:lnTo>
+                    <a:pt x="1573494" y="1490066"/>
+                  </a:lnTo>
+                  <a:lnTo>
+                    <a:pt x="1645117" y="1540076"/>
+                  </a:lnTo>
+                  <a:lnTo>
+                    <a:pt x="1716739" y="1588832"/>
+                  </a:lnTo>
+                  <a:lnTo>
+                    <a:pt x="1788362" y="1636365"/>
+                  </a:lnTo>
+                  <a:lnTo>
+                    <a:pt x="1859984" y="1682706"/>
+                  </a:lnTo>
+                  <a:lnTo>
+                    <a:pt x="1931607" y="1727884"/>
+                  </a:lnTo>
+                  <a:lnTo>
+                    <a:pt x="2003229" y="1771928"/>
+                  </a:lnTo>
+                  <a:lnTo>
+                    <a:pt x="2074852" y="1814868"/>
+                  </a:lnTo>
+                  <a:lnTo>
+                    <a:pt x="2146475" y="1856731"/>
+                  </a:lnTo>
+                  <a:lnTo>
+                    <a:pt x="2218097" y="1897544"/>
+                  </a:lnTo>
+                  <a:lnTo>
+                    <a:pt x="2289720" y="1937333"/>
+                  </a:lnTo>
+                  <a:lnTo>
+                    <a:pt x="2361342" y="1976124"/>
+                  </a:lnTo>
+                  <a:lnTo>
+                    <a:pt x="2432965" y="2013942"/>
+                  </a:lnTo>
+                  <a:lnTo>
+                    <a:pt x="2504587" y="2050811"/>
+                  </a:lnTo>
+                  <a:lnTo>
+                    <a:pt x="2576210" y="2086755"/>
+                  </a:lnTo>
+                  <a:lnTo>
+                    <a:pt x="2647832" y="2121798"/>
+                  </a:lnTo>
+                  <a:lnTo>
+                    <a:pt x="2719455" y="2155962"/>
+                  </a:lnTo>
+                  <a:lnTo>
+                    <a:pt x="2791077" y="2189269"/>
+                  </a:lnTo>
+                  <a:lnTo>
+                    <a:pt x="2862700" y="2221740"/>
+                  </a:lnTo>
+                  <a:lnTo>
+                    <a:pt x="2934322" y="2253397"/>
+                  </a:lnTo>
+                  <a:lnTo>
+                    <a:pt x="3005945" y="2284259"/>
+                  </a:lnTo>
+                  <a:lnTo>
+                    <a:pt x="3077567" y="2314348"/>
+                  </a:lnTo>
+                  <a:lnTo>
+                    <a:pt x="3149190" y="2343681"/>
+                  </a:lnTo>
+                  <a:lnTo>
+                    <a:pt x="3220812" y="2372279"/>
+                  </a:lnTo>
+                  <a:lnTo>
+                    <a:pt x="3292435" y="2400160"/>
+                  </a:lnTo>
+                  <a:lnTo>
+                    <a:pt x="3364057" y="2427341"/>
+                  </a:lnTo>
+                  <a:lnTo>
+                    <a:pt x="3435680" y="2453840"/>
+                  </a:lnTo>
+                  <a:lnTo>
+                    <a:pt x="3507303" y="2479675"/>
+                  </a:lnTo>
+                  <a:lnTo>
+                    <a:pt x="3578925" y="2504861"/>
+                  </a:lnTo>
+                  <a:lnTo>
+                    <a:pt x="3650548" y="2529416"/>
+                  </a:lnTo>
+                  <a:lnTo>
+                    <a:pt x="3722170" y="2553355"/>
+                  </a:lnTo>
+                  <a:lnTo>
+                    <a:pt x="3793793" y="2576693"/>
+                  </a:lnTo>
+                  <a:lnTo>
+                    <a:pt x="3865415" y="2599446"/>
+                  </a:lnTo>
+                  <a:lnTo>
+                    <a:pt x="3937038" y="2621629"/>
+                  </a:lnTo>
+                  <a:lnTo>
+                    <a:pt x="4008660" y="2643254"/>
+                  </a:lnTo>
+                  <a:lnTo>
+                    <a:pt x="4080283" y="2657414"/>
+                  </a:lnTo>
+                  <a:lnTo>
+                    <a:pt x="4151905" y="2663897"/>
+                  </a:lnTo>
+                  <a:lnTo>
+                    <a:pt x="4223528" y="2670330"/>
+                  </a:lnTo>
+                  <a:lnTo>
+                    <a:pt x="4295150" y="2676713"/>
+                  </a:lnTo>
+                  <a:lnTo>
+                    <a:pt x="4366773" y="2683045"/>
+                  </a:lnTo>
+                  <a:lnTo>
+                    <a:pt x="4438395" y="2689328"/>
+                  </a:lnTo>
+                  <a:lnTo>
+                    <a:pt x="4510018" y="2695561"/>
+                  </a:lnTo>
+                  <a:lnTo>
+                    <a:pt x="4581640" y="2701745"/>
+                  </a:lnTo>
+                  <a:lnTo>
+                    <a:pt x="4653263" y="2707881"/>
+                  </a:lnTo>
+                  <a:lnTo>
+                    <a:pt x="4724885" y="2713969"/>
+                  </a:lnTo>
+                  <a:lnTo>
+                    <a:pt x="4796508" y="2720009"/>
+                  </a:lnTo>
+                  <a:lnTo>
+                    <a:pt x="4868131" y="2726002"/>
+                  </a:lnTo>
+                  <a:lnTo>
+                    <a:pt x="4939753" y="2731947"/>
+                  </a:lnTo>
+                  <a:lnTo>
+                    <a:pt x="5011376" y="2737846"/>
+                  </a:lnTo>
+                  <a:lnTo>
+                    <a:pt x="5082998" y="2743699"/>
+                  </a:lnTo>
+                  <a:lnTo>
+                    <a:pt x="5154621" y="2749505"/>
+                  </a:lnTo>
+                  <a:lnTo>
+                    <a:pt x="5226243" y="2755267"/>
+                  </a:lnTo>
+                  <a:lnTo>
+                    <a:pt x="5297866" y="2760983"/>
+                  </a:lnTo>
+                  <a:lnTo>
+                    <a:pt x="5369488" y="2766654"/>
+                  </a:lnTo>
+                  <a:lnTo>
+                    <a:pt x="5441111" y="2772280"/>
+                  </a:lnTo>
+                  <a:lnTo>
+                    <a:pt x="5512733" y="2777863"/>
+                  </a:lnTo>
+                  <a:lnTo>
+                    <a:pt x="5584356" y="2783401"/>
+                  </a:lnTo>
+                  <a:lnTo>
+                    <a:pt x="5655978" y="2788897"/>
+                  </a:lnTo>
+                  <a:lnTo>
+                    <a:pt x="5727601" y="2794349"/>
+                  </a:lnTo>
+                  <a:lnTo>
+                    <a:pt x="5799223" y="2799758"/>
+                  </a:lnTo>
+                  <a:lnTo>
+                    <a:pt x="5870846" y="2805125"/>
+                  </a:lnTo>
+                  <a:lnTo>
+                    <a:pt x="5942468" y="2810450"/>
+                  </a:lnTo>
+                  <a:lnTo>
+                    <a:pt x="6014091" y="2815732"/>
+                  </a:lnTo>
+                  <a:lnTo>
+                    <a:pt x="6085713" y="2820974"/>
+                  </a:lnTo>
+                  <a:lnTo>
+                    <a:pt x="6157336" y="2826174"/>
+                  </a:lnTo>
+                  <a:lnTo>
+                    <a:pt x="6228959" y="2831334"/>
+                  </a:lnTo>
+                  <a:lnTo>
+                    <a:pt x="6300581" y="2836453"/>
+                  </a:lnTo>
+                  <a:lnTo>
+                    <a:pt x="6372204" y="2841532"/>
+                  </a:lnTo>
+                  <a:lnTo>
+                    <a:pt x="6443826" y="2846571"/>
+                  </a:lnTo>
+                  <a:lnTo>
+                    <a:pt x="6515449" y="2851571"/>
                   </a:lnTo>
                 </a:path>
               </a:pathLst>
@@ -3836,309 +3824,309 @@
           </p:nvSpPr>
           <p:spPr>
             <a:xfrm>
-              <a:off x="1172049" y="4226796"/>
-              <a:ext cx="7090630" cy="978872"/>
+              <a:off x="1172049" y="4178372"/>
+              <a:ext cx="7090630" cy="1033432"/>
             </a:xfrm>
             <a:custGeom>
               <a:avLst/>
               <a:pathLst>
-                <a:path w="7090630" h="978872">
+                <a:path w="7090630" h="1033432">
                   <a:moveTo>
-                    <a:pt x="7090630" y="978872"/>
+                    <a:pt x="7090630" y="1033432"/>
                   </a:moveTo>
                   <a:lnTo>
-                    <a:pt x="7019007" y="970044"/>
-                  </a:lnTo>
-                  <a:lnTo>
-                    <a:pt x="6947385" y="960994"/>
-                  </a:lnTo>
-                  <a:lnTo>
-                    <a:pt x="6875762" y="951717"/>
-                  </a:lnTo>
-                  <a:lnTo>
-                    <a:pt x="6804139" y="942207"/>
-                  </a:lnTo>
-                  <a:lnTo>
-                    <a:pt x="6732517" y="932458"/>
-                  </a:lnTo>
-                  <a:lnTo>
-                    <a:pt x="6660894" y="922464"/>
-                  </a:lnTo>
-                  <a:lnTo>
-                    <a:pt x="6589272" y="912219"/>
-                  </a:lnTo>
-                  <a:lnTo>
-                    <a:pt x="6517649" y="901718"/>
-                  </a:lnTo>
-                  <a:lnTo>
-                    <a:pt x="6446027" y="890952"/>
-                  </a:lnTo>
-                  <a:lnTo>
-                    <a:pt x="6374404" y="879916"/>
-                  </a:lnTo>
-                  <a:lnTo>
-                    <a:pt x="6302782" y="868603"/>
-                  </a:lnTo>
-                  <a:lnTo>
-                    <a:pt x="6231159" y="857006"/>
-                  </a:lnTo>
-                  <a:lnTo>
-                    <a:pt x="6159537" y="845118"/>
-                  </a:lnTo>
-                  <a:lnTo>
-                    <a:pt x="6087914" y="832931"/>
-                  </a:lnTo>
-                  <a:lnTo>
-                    <a:pt x="6016292" y="820438"/>
-                  </a:lnTo>
-                  <a:lnTo>
-                    <a:pt x="5944669" y="807632"/>
-                  </a:lnTo>
-                  <a:lnTo>
-                    <a:pt x="5873047" y="794504"/>
-                  </a:lnTo>
-                  <a:lnTo>
-                    <a:pt x="5801424" y="781046"/>
-                  </a:lnTo>
-                  <a:lnTo>
-                    <a:pt x="5729802" y="767250"/>
-                  </a:lnTo>
-                  <a:lnTo>
-                    <a:pt x="5658179" y="753108"/>
-                  </a:lnTo>
-                  <a:lnTo>
-                    <a:pt x="5586557" y="738611"/>
-                  </a:lnTo>
-                  <a:lnTo>
-                    <a:pt x="5514934" y="723750"/>
-                  </a:lnTo>
-                  <a:lnTo>
-                    <a:pt x="5443311" y="708515"/>
-                  </a:lnTo>
-                  <a:lnTo>
-                    <a:pt x="5371689" y="692899"/>
-                  </a:lnTo>
-                  <a:lnTo>
-                    <a:pt x="5300066" y="676890"/>
-                  </a:lnTo>
-                  <a:lnTo>
-                    <a:pt x="5228444" y="660478"/>
-                  </a:lnTo>
-                  <a:lnTo>
-                    <a:pt x="5156821" y="643655"/>
-                  </a:lnTo>
-                  <a:lnTo>
-                    <a:pt x="5085199" y="626410"/>
-                  </a:lnTo>
-                  <a:lnTo>
-                    <a:pt x="5013576" y="608731"/>
-                  </a:lnTo>
-                  <a:lnTo>
-                    <a:pt x="4941954" y="590609"/>
-                  </a:lnTo>
-                  <a:lnTo>
-                    <a:pt x="4870331" y="572031"/>
-                  </a:lnTo>
-                  <a:lnTo>
-                    <a:pt x="4798709" y="552987"/>
-                  </a:lnTo>
-                  <a:lnTo>
-                    <a:pt x="4727086" y="533465"/>
-                  </a:lnTo>
-                  <a:lnTo>
-                    <a:pt x="4655464" y="513453"/>
-                  </a:lnTo>
-                  <a:lnTo>
-                    <a:pt x="4583841" y="498615"/>
-                  </a:lnTo>
-                  <a:lnTo>
-                    <a:pt x="4512219" y="492488"/>
-                  </a:lnTo>
-                  <a:lnTo>
-                    <a:pt x="4440596" y="486317"/>
-                  </a:lnTo>
-                  <a:lnTo>
-                    <a:pt x="4368974" y="480100"/>
-                  </a:lnTo>
-                  <a:lnTo>
-                    <a:pt x="4297351" y="473837"/>
-                  </a:lnTo>
-                  <a:lnTo>
-                    <a:pt x="4225729" y="467528"/>
-                  </a:lnTo>
-                  <a:lnTo>
-                    <a:pt x="4154106" y="461172"/>
-                  </a:lnTo>
-                  <a:lnTo>
-                    <a:pt x="4082483" y="454770"/>
-                  </a:lnTo>
-                  <a:lnTo>
-                    <a:pt x="4010861" y="448320"/>
-                  </a:lnTo>
-                  <a:lnTo>
-                    <a:pt x="3939238" y="441823"/>
-                  </a:lnTo>
-                  <a:lnTo>
-                    <a:pt x="3867616" y="435279"/>
-                  </a:lnTo>
-                  <a:lnTo>
-                    <a:pt x="3795993" y="428685"/>
-                  </a:lnTo>
-                  <a:lnTo>
-                    <a:pt x="3724371" y="422044"/>
-                  </a:lnTo>
-                  <a:lnTo>
-                    <a:pt x="3652748" y="415353"/>
-                  </a:lnTo>
-                  <a:lnTo>
-                    <a:pt x="3581126" y="408614"/>
-                  </a:lnTo>
-                  <a:lnTo>
-                    <a:pt x="3509503" y="401824"/>
-                  </a:lnTo>
-                  <a:lnTo>
-                    <a:pt x="3437881" y="394985"/>
-                  </a:lnTo>
-                  <a:lnTo>
-                    <a:pt x="3366258" y="388095"/>
-                  </a:lnTo>
-                  <a:lnTo>
-                    <a:pt x="3294636" y="381154"/>
-                  </a:lnTo>
-                  <a:lnTo>
-                    <a:pt x="3223013" y="374163"/>
-                  </a:lnTo>
-                  <a:lnTo>
-                    <a:pt x="3151391" y="367120"/>
-                  </a:lnTo>
-                  <a:lnTo>
-                    <a:pt x="3079768" y="360025"/>
-                  </a:lnTo>
-                  <a:lnTo>
-                    <a:pt x="3008146" y="352877"/>
-                  </a:lnTo>
-                  <a:lnTo>
-                    <a:pt x="2936523" y="345677"/>
-                  </a:lnTo>
-                  <a:lnTo>
-                    <a:pt x="2864901" y="338425"/>
-                  </a:lnTo>
-                  <a:lnTo>
-                    <a:pt x="2793278" y="331118"/>
-                  </a:lnTo>
-                  <a:lnTo>
-                    <a:pt x="2721655" y="323758"/>
-                  </a:lnTo>
-                  <a:lnTo>
-                    <a:pt x="2650033" y="316344"/>
-                  </a:lnTo>
-                  <a:lnTo>
-                    <a:pt x="2578410" y="308875"/>
-                  </a:lnTo>
-                  <a:lnTo>
-                    <a:pt x="2506788" y="301351"/>
-                  </a:lnTo>
-                  <a:lnTo>
-                    <a:pt x="2435165" y="293771"/>
-                  </a:lnTo>
-                  <a:lnTo>
-                    <a:pt x="2363543" y="286136"/>
-                  </a:lnTo>
-                  <a:lnTo>
-                    <a:pt x="2291920" y="278445"/>
-                  </a:lnTo>
-                  <a:lnTo>
-                    <a:pt x="2220298" y="270696"/>
-                  </a:lnTo>
-                  <a:lnTo>
-                    <a:pt x="2148675" y="262891"/>
-                  </a:lnTo>
-                  <a:lnTo>
-                    <a:pt x="2077053" y="255029"/>
-                  </a:lnTo>
-                  <a:lnTo>
-                    <a:pt x="2005430" y="247108"/>
-                  </a:lnTo>
-                  <a:lnTo>
-                    <a:pt x="1933808" y="239129"/>
-                  </a:lnTo>
-                  <a:lnTo>
-                    <a:pt x="1862185" y="231091"/>
-                  </a:lnTo>
-                  <a:lnTo>
-                    <a:pt x="1790563" y="222994"/>
-                  </a:lnTo>
-                  <a:lnTo>
-                    <a:pt x="1718940" y="214838"/>
-                  </a:lnTo>
-                  <a:lnTo>
-                    <a:pt x="1647318" y="206621"/>
-                  </a:lnTo>
-                  <a:lnTo>
-                    <a:pt x="1575695" y="198344"/>
-                  </a:lnTo>
-                  <a:lnTo>
-                    <a:pt x="1504073" y="190006"/>
-                  </a:lnTo>
-                  <a:lnTo>
-                    <a:pt x="1432450" y="181607"/>
-                  </a:lnTo>
-                  <a:lnTo>
-                    <a:pt x="1360827" y="173145"/>
-                  </a:lnTo>
-                  <a:lnTo>
-                    <a:pt x="1289205" y="164622"/>
-                  </a:lnTo>
-                  <a:lnTo>
-                    <a:pt x="1217582" y="156035"/>
-                  </a:lnTo>
-                  <a:lnTo>
-                    <a:pt x="1145960" y="147386"/>
-                  </a:lnTo>
-                  <a:lnTo>
-                    <a:pt x="1074337" y="138672"/>
-                  </a:lnTo>
-                  <a:lnTo>
-                    <a:pt x="1002715" y="129895"/>
-                  </a:lnTo>
-                  <a:lnTo>
-                    <a:pt x="931092" y="121053"/>
-                  </a:lnTo>
-                  <a:lnTo>
-                    <a:pt x="859470" y="112145"/>
-                  </a:lnTo>
-                  <a:lnTo>
-                    <a:pt x="787847" y="103172"/>
-                  </a:lnTo>
-                  <a:lnTo>
-                    <a:pt x="716225" y="94133"/>
-                  </a:lnTo>
-                  <a:lnTo>
-                    <a:pt x="644602" y="85028"/>
-                  </a:lnTo>
-                  <a:lnTo>
-                    <a:pt x="572980" y="75855"/>
-                  </a:lnTo>
-                  <a:lnTo>
-                    <a:pt x="501357" y="66615"/>
-                  </a:lnTo>
-                  <a:lnTo>
-                    <a:pt x="429735" y="57307"/>
-                  </a:lnTo>
-                  <a:lnTo>
-                    <a:pt x="358112" y="47930"/>
-                  </a:lnTo>
-                  <a:lnTo>
-                    <a:pt x="286490" y="38484"/>
-                  </a:lnTo>
-                  <a:lnTo>
-                    <a:pt x="214867" y="28968"/>
-                  </a:lnTo>
-                  <a:lnTo>
-                    <a:pt x="143245" y="19383"/>
-                  </a:lnTo>
-                  <a:lnTo>
-                    <a:pt x="71622" y="9727"/>
+                    <a:pt x="7019007" y="1024544"/>
+                  </a:lnTo>
+                  <a:lnTo>
+                    <a:pt x="6947385" y="1015427"/>
+                  </a:lnTo>
+                  <a:lnTo>
+                    <a:pt x="6875762" y="1006076"/>
+                  </a:lnTo>
+                  <a:lnTo>
+                    <a:pt x="6804139" y="996483"/>
+                  </a:lnTo>
+                  <a:lnTo>
+                    <a:pt x="6732517" y="986645"/>
+                  </a:lnTo>
+                  <a:lnTo>
+                    <a:pt x="6660894" y="976552"/>
+                  </a:lnTo>
+                  <a:lnTo>
+                    <a:pt x="6589272" y="966201"/>
+                  </a:lnTo>
+                  <a:lnTo>
+                    <a:pt x="6517649" y="955583"/>
+                  </a:lnTo>
+                  <a:lnTo>
+                    <a:pt x="6446027" y="944691"/>
+                  </a:lnTo>
+                  <a:lnTo>
+                    <a:pt x="6374404" y="933520"/>
+                  </a:lnTo>
+                  <a:lnTo>
+                    <a:pt x="6302782" y="922061"/>
+                  </a:lnTo>
+                  <a:lnTo>
+                    <a:pt x="6231159" y="910307"/>
+                  </a:lnTo>
+                  <a:lnTo>
+                    <a:pt x="6159537" y="898251"/>
+                  </a:lnTo>
+                  <a:lnTo>
+                    <a:pt x="6087914" y="885884"/>
+                  </a:lnTo>
+                  <a:lnTo>
+                    <a:pt x="6016292" y="873200"/>
+                  </a:lnTo>
+                  <a:lnTo>
+                    <a:pt x="5944669" y="860189"/>
+                  </a:lnTo>
+                  <a:lnTo>
+                    <a:pt x="5873047" y="846843"/>
+                  </a:lnTo>
+                  <a:lnTo>
+                    <a:pt x="5801424" y="833154"/>
+                  </a:lnTo>
+                  <a:lnTo>
+                    <a:pt x="5729802" y="819112"/>
+                  </a:lnTo>
+                  <a:lnTo>
+                    <a:pt x="5658179" y="804710"/>
+                  </a:lnTo>
+                  <a:lnTo>
+                    <a:pt x="5586557" y="789936"/>
+                  </a:lnTo>
+                  <a:lnTo>
+                    <a:pt x="5514934" y="774783"/>
+                  </a:lnTo>
+                  <a:lnTo>
+                    <a:pt x="5443311" y="759240"/>
+                  </a:lnTo>
+                  <a:lnTo>
+                    <a:pt x="5371689" y="743297"/>
+                  </a:lnTo>
+                  <a:lnTo>
+                    <a:pt x="5300066" y="726943"/>
+                  </a:lnTo>
+                  <a:lnTo>
+                    <a:pt x="5228444" y="710169"/>
+                  </a:lnTo>
+                  <a:lnTo>
+                    <a:pt x="5156821" y="692963"/>
+                  </a:lnTo>
+                  <a:lnTo>
+                    <a:pt x="5085199" y="675315"/>
+                  </a:lnTo>
+                  <a:lnTo>
+                    <a:pt x="5013576" y="657212"/>
+                  </a:lnTo>
+                  <a:lnTo>
+                    <a:pt x="4941954" y="638644"/>
+                  </a:lnTo>
+                  <a:lnTo>
+                    <a:pt x="4870331" y="619598"/>
+                  </a:lnTo>
+                  <a:lnTo>
+                    <a:pt x="4798709" y="600062"/>
+                  </a:lnTo>
+                  <a:lnTo>
+                    <a:pt x="4727086" y="580023"/>
+                  </a:lnTo>
+                  <a:lnTo>
+                    <a:pt x="4655464" y="559468"/>
+                  </a:lnTo>
+                  <a:lnTo>
+                    <a:pt x="4583841" y="546010"/>
+                  </a:lnTo>
+                  <a:lnTo>
+                    <a:pt x="4512219" y="539423"/>
+                  </a:lnTo>
+                  <a:lnTo>
+                    <a:pt x="4440596" y="532784"/>
+                  </a:lnTo>
+                  <a:lnTo>
+                    <a:pt x="4368974" y="526093"/>
+                  </a:lnTo>
+                  <a:lnTo>
+                    <a:pt x="4297351" y="519349"/>
+                  </a:lnTo>
+                  <a:lnTo>
+                    <a:pt x="4225729" y="512551"/>
+                  </a:lnTo>
+                  <a:lnTo>
+                    <a:pt x="4154106" y="505700"/>
+                  </a:lnTo>
+                  <a:lnTo>
+                    <a:pt x="4082483" y="498794"/>
+                  </a:lnTo>
+                  <a:lnTo>
+                    <a:pt x="4010861" y="491834"/>
+                  </a:lnTo>
+                  <a:lnTo>
+                    <a:pt x="3939238" y="484819"/>
+                  </a:lnTo>
+                  <a:lnTo>
+                    <a:pt x="3867616" y="477748"/>
+                  </a:lnTo>
+                  <a:lnTo>
+                    <a:pt x="3795993" y="470622"/>
+                  </a:lnTo>
+                  <a:lnTo>
+                    <a:pt x="3724371" y="463439"/>
+                  </a:lnTo>
+                  <a:lnTo>
+                    <a:pt x="3652748" y="456199"/>
+                  </a:lnTo>
+                  <a:lnTo>
+                    <a:pt x="3581126" y="448902"/>
+                  </a:lnTo>
+                  <a:lnTo>
+                    <a:pt x="3509503" y="441548"/>
+                  </a:lnTo>
+                  <a:lnTo>
+                    <a:pt x="3437881" y="434135"/>
+                  </a:lnTo>
+                  <a:lnTo>
+                    <a:pt x="3366258" y="426663"/>
+                  </a:lnTo>
+                  <a:lnTo>
+                    <a:pt x="3294636" y="419133"/>
+                  </a:lnTo>
+                  <a:lnTo>
+                    <a:pt x="3223013" y="411543"/>
+                  </a:lnTo>
+                  <a:lnTo>
+                    <a:pt x="3151391" y="403892"/>
+                  </a:lnTo>
+                  <a:lnTo>
+                    <a:pt x="3079768" y="396182"/>
+                  </a:lnTo>
+                  <a:lnTo>
+                    <a:pt x="3008146" y="388410"/>
+                  </a:lnTo>
+                  <a:lnTo>
+                    <a:pt x="2936523" y="380577"/>
+                  </a:lnTo>
+                  <a:lnTo>
+                    <a:pt x="2864901" y="372682"/>
+                  </a:lnTo>
+                  <a:lnTo>
+                    <a:pt x="2793278" y="364725"/>
+                  </a:lnTo>
+                  <a:lnTo>
+                    <a:pt x="2721655" y="356704"/>
+                  </a:lnTo>
+                  <a:lnTo>
+                    <a:pt x="2650033" y="348621"/>
+                  </a:lnTo>
+                  <a:lnTo>
+                    <a:pt x="2578410" y="340473"/>
+                  </a:lnTo>
+                  <a:lnTo>
+                    <a:pt x="2506788" y="332261"/>
+                  </a:lnTo>
+                  <a:lnTo>
+                    <a:pt x="2435165" y="323984"/>
+                  </a:lnTo>
+                  <a:lnTo>
+                    <a:pt x="2363543" y="315641"/>
+                  </a:lnTo>
+                  <a:lnTo>
+                    <a:pt x="2291920" y="307232"/>
+                  </a:lnTo>
+                  <a:lnTo>
+                    <a:pt x="2220298" y="298757"/>
+                  </a:lnTo>
+                  <a:lnTo>
+                    <a:pt x="2148675" y="290215"/>
+                  </a:lnTo>
+                  <a:lnTo>
+                    <a:pt x="2077053" y="281606"/>
+                  </a:lnTo>
+                  <a:lnTo>
+                    <a:pt x="2005430" y="272928"/>
+                  </a:lnTo>
+                  <a:lnTo>
+                    <a:pt x="1933808" y="264181"/>
+                  </a:lnTo>
+                  <a:lnTo>
+                    <a:pt x="1862185" y="255366"/>
+                  </a:lnTo>
+                  <a:lnTo>
+                    <a:pt x="1790563" y="246481"/>
+                  </a:lnTo>
+                  <a:lnTo>
+                    <a:pt x="1718940" y="237525"/>
+                  </a:lnTo>
+                  <a:lnTo>
+                    <a:pt x="1647318" y="228499"/>
+                  </a:lnTo>
+                  <a:lnTo>
+                    <a:pt x="1575695" y="219401"/>
+                  </a:lnTo>
+                  <a:lnTo>
+                    <a:pt x="1504073" y="210232"/>
+                  </a:lnTo>
+                  <a:lnTo>
+                    <a:pt x="1432450" y="200989"/>
+                  </a:lnTo>
+                  <a:lnTo>
+                    <a:pt x="1360827" y="191674"/>
+                  </a:lnTo>
+                  <a:lnTo>
+                    <a:pt x="1289205" y="182285"/>
+                  </a:lnTo>
+                  <a:lnTo>
+                    <a:pt x="1217582" y="172822"/>
+                  </a:lnTo>
+                  <a:lnTo>
+                    <a:pt x="1145960" y="163284"/>
+                  </a:lnTo>
+                  <a:lnTo>
+                    <a:pt x="1074337" y="153670"/>
+                  </a:lnTo>
+                  <a:lnTo>
+                    <a:pt x="1002715" y="143981"/>
+                  </a:lnTo>
+                  <a:lnTo>
+                    <a:pt x="931092" y="134215"/>
+                  </a:lnTo>
+                  <a:lnTo>
+                    <a:pt x="859470" y="124371"/>
+                  </a:lnTo>
+                  <a:lnTo>
+                    <a:pt x="787847" y="114450"/>
+                  </a:lnTo>
+                  <a:lnTo>
+                    <a:pt x="716225" y="104451"/>
+                  </a:lnTo>
+                  <a:lnTo>
+                    <a:pt x="644602" y="94372"/>
+                  </a:lnTo>
+                  <a:lnTo>
+                    <a:pt x="572980" y="84213"/>
+                  </a:lnTo>
+                  <a:lnTo>
+                    <a:pt x="501357" y="73975"/>
+                  </a:lnTo>
+                  <a:lnTo>
+                    <a:pt x="429735" y="63655"/>
+                  </a:lnTo>
+                  <a:lnTo>
+                    <a:pt x="358112" y="53253"/>
+                  </a:lnTo>
+                  <a:lnTo>
+                    <a:pt x="286490" y="42770"/>
+                  </a:lnTo>
+                  <a:lnTo>
+                    <a:pt x="214867" y="32203"/>
+                  </a:lnTo>
+                  <a:lnTo>
+                    <a:pt x="143245" y="21553"/>
+                  </a:lnTo>
+                  <a:lnTo>
+                    <a:pt x="71622" y="10819"/>
                   </a:lnTo>
                   <a:lnTo>
                     <a:pt x="0" y="0"/>
@@ -4161,312 +4149,312 @@
           </p:nvSpPr>
           <p:spPr>
             <a:xfrm>
-              <a:off x="1172049" y="3222974"/>
-              <a:ext cx="7090630" cy="1858654"/>
+              <a:off x="1172049" y="3130161"/>
+              <a:ext cx="7090630" cy="1959774"/>
             </a:xfrm>
             <a:custGeom>
               <a:avLst/>
               <a:pathLst>
-                <a:path w="7090630" h="1858654">
+                <a:path w="7090630" h="1959774">
                   <a:moveTo>
                     <a:pt x="0" y="0"/>
                   </a:moveTo>
                   <a:lnTo>
-                    <a:pt x="71622" y="37209"/>
-                  </a:lnTo>
-                  <a:lnTo>
-                    <a:pt x="143245" y="73826"/>
-                  </a:lnTo>
-                  <a:lnTo>
-                    <a:pt x="214867" y="109859"/>
-                  </a:lnTo>
-                  <a:lnTo>
-                    <a:pt x="286490" y="145318"/>
-                  </a:lnTo>
-                  <a:lnTo>
-                    <a:pt x="358112" y="180211"/>
-                  </a:lnTo>
-                  <a:lnTo>
-                    <a:pt x="429735" y="214548"/>
-                  </a:lnTo>
-                  <a:lnTo>
-                    <a:pt x="501357" y="248338"/>
-                  </a:lnTo>
-                  <a:lnTo>
-                    <a:pt x="572980" y="281589"/>
-                  </a:lnTo>
-                  <a:lnTo>
-                    <a:pt x="644602" y="314310"/>
-                  </a:lnTo>
-                  <a:lnTo>
-                    <a:pt x="716225" y="346510"/>
-                  </a:lnTo>
-                  <a:lnTo>
-                    <a:pt x="787847" y="378196"/>
-                  </a:lnTo>
-                  <a:lnTo>
-                    <a:pt x="859470" y="409377"/>
-                  </a:lnTo>
-                  <a:lnTo>
-                    <a:pt x="931092" y="440061"/>
-                  </a:lnTo>
-                  <a:lnTo>
-                    <a:pt x="1002715" y="470256"/>
-                  </a:lnTo>
-                  <a:lnTo>
-                    <a:pt x="1074337" y="499970"/>
-                  </a:lnTo>
-                  <a:lnTo>
-                    <a:pt x="1145960" y="529210"/>
-                  </a:lnTo>
-                  <a:lnTo>
-                    <a:pt x="1217582" y="557983"/>
-                  </a:lnTo>
-                  <a:lnTo>
-                    <a:pt x="1289205" y="586299"/>
-                  </a:lnTo>
-                  <a:lnTo>
-                    <a:pt x="1360827" y="614162"/>
-                  </a:lnTo>
-                  <a:lnTo>
-                    <a:pt x="1432450" y="641582"/>
-                  </a:lnTo>
-                  <a:lnTo>
-                    <a:pt x="1504073" y="668565"/>
-                  </a:lnTo>
-                  <a:lnTo>
-                    <a:pt x="1575695" y="695117"/>
-                  </a:lnTo>
-                  <a:lnTo>
-                    <a:pt x="1647318" y="721246"/>
-                  </a:lnTo>
-                  <a:lnTo>
-                    <a:pt x="1718940" y="746959"/>
-                  </a:lnTo>
-                  <a:lnTo>
-                    <a:pt x="1790563" y="772262"/>
-                  </a:lnTo>
-                  <a:lnTo>
-                    <a:pt x="1862185" y="797161"/>
-                  </a:lnTo>
-                  <a:lnTo>
-                    <a:pt x="1933808" y="821664"/>
-                  </a:lnTo>
-                  <a:lnTo>
-                    <a:pt x="2005430" y="845776"/>
-                  </a:lnTo>
-                  <a:lnTo>
-                    <a:pt x="2077053" y="869503"/>
-                  </a:lnTo>
-                  <a:lnTo>
-                    <a:pt x="2148675" y="892853"/>
-                  </a:lnTo>
-                  <a:lnTo>
-                    <a:pt x="2220298" y="915830"/>
-                  </a:lnTo>
-                  <a:lnTo>
-                    <a:pt x="2291920" y="938441"/>
-                  </a:lnTo>
-                  <a:lnTo>
-                    <a:pt x="2363543" y="960691"/>
-                  </a:lnTo>
-                  <a:lnTo>
-                    <a:pt x="2435165" y="982587"/>
-                  </a:lnTo>
-                  <a:lnTo>
-                    <a:pt x="2506788" y="1004134"/>
-                  </a:lnTo>
-                  <a:lnTo>
-                    <a:pt x="2578410" y="1025337"/>
-                  </a:lnTo>
-                  <a:lnTo>
-                    <a:pt x="2650033" y="1046203"/>
-                  </a:lnTo>
-                  <a:lnTo>
-                    <a:pt x="2721655" y="1066735"/>
-                  </a:lnTo>
-                  <a:lnTo>
-                    <a:pt x="2793278" y="1086941"/>
-                  </a:lnTo>
-                  <a:lnTo>
-                    <a:pt x="2864901" y="1106824"/>
-                  </a:lnTo>
-                  <a:lnTo>
-                    <a:pt x="2936523" y="1126390"/>
-                  </a:lnTo>
-                  <a:lnTo>
-                    <a:pt x="3008146" y="1145645"/>
-                  </a:lnTo>
-                  <a:lnTo>
-                    <a:pt x="3079768" y="1164592"/>
-                  </a:lnTo>
-                  <a:lnTo>
-                    <a:pt x="3151391" y="1183238"/>
-                  </a:lnTo>
-                  <a:lnTo>
-                    <a:pt x="3223013" y="1201586"/>
-                  </a:lnTo>
-                  <a:lnTo>
-                    <a:pt x="3294636" y="1219642"/>
-                  </a:lnTo>
-                  <a:lnTo>
-                    <a:pt x="3366258" y="1237410"/>
-                  </a:lnTo>
-                  <a:lnTo>
-                    <a:pt x="3437881" y="1254894"/>
-                  </a:lnTo>
-                  <a:lnTo>
-                    <a:pt x="3509503" y="1272100"/>
-                  </a:lnTo>
-                  <a:lnTo>
-                    <a:pt x="3581126" y="1289032"/>
-                  </a:lnTo>
-                  <a:lnTo>
-                    <a:pt x="3652748" y="1305694"/>
-                  </a:lnTo>
-                  <a:lnTo>
-                    <a:pt x="3724371" y="1322090"/>
-                  </a:lnTo>
-                  <a:lnTo>
-                    <a:pt x="3795993" y="1338225"/>
-                  </a:lnTo>
-                  <a:lnTo>
-                    <a:pt x="3867616" y="1354103"/>
-                  </a:lnTo>
-                  <a:lnTo>
-                    <a:pt x="3939238" y="1369727"/>
-                  </a:lnTo>
-                  <a:lnTo>
-                    <a:pt x="4010861" y="1385103"/>
-                  </a:lnTo>
-                  <a:lnTo>
-                    <a:pt x="4082483" y="1400233"/>
-                  </a:lnTo>
-                  <a:lnTo>
-                    <a:pt x="4154106" y="1415122"/>
-                  </a:lnTo>
-                  <a:lnTo>
-                    <a:pt x="4225729" y="1429774"/>
-                  </a:lnTo>
-                  <a:lnTo>
-                    <a:pt x="4297351" y="1444193"/>
-                  </a:lnTo>
-                  <a:lnTo>
-                    <a:pt x="4368974" y="1458381"/>
-                  </a:lnTo>
-                  <a:lnTo>
-                    <a:pt x="4440596" y="1472343"/>
-                  </a:lnTo>
-                  <a:lnTo>
-                    <a:pt x="4512219" y="1486083"/>
-                  </a:lnTo>
-                  <a:lnTo>
-                    <a:pt x="4583841" y="1499604"/>
-                  </a:lnTo>
-                  <a:lnTo>
-                    <a:pt x="4655464" y="1512909"/>
-                  </a:lnTo>
-                  <a:lnTo>
-                    <a:pt x="4727086" y="1526002"/>
-                  </a:lnTo>
-                  <a:lnTo>
-                    <a:pt x="4798709" y="1538886"/>
-                  </a:lnTo>
-                  <a:lnTo>
-                    <a:pt x="4870331" y="1551565"/>
-                  </a:lnTo>
-                  <a:lnTo>
-                    <a:pt x="4941954" y="1564042"/>
-                  </a:lnTo>
-                  <a:lnTo>
-                    <a:pt x="5013576" y="1576320"/>
-                  </a:lnTo>
-                  <a:lnTo>
-                    <a:pt x="5085199" y="1588403"/>
-                  </a:lnTo>
-                  <a:lnTo>
-                    <a:pt x="5156821" y="1600292"/>
-                  </a:lnTo>
-                  <a:lnTo>
-                    <a:pt x="5228444" y="1611992"/>
-                  </a:lnTo>
-                  <a:lnTo>
-                    <a:pt x="5300066" y="1623506"/>
-                  </a:lnTo>
-                  <a:lnTo>
-                    <a:pt x="5371689" y="1634836"/>
-                  </a:lnTo>
-                  <a:lnTo>
-                    <a:pt x="5443311" y="1645986"/>
-                  </a:lnTo>
-                  <a:lnTo>
-                    <a:pt x="5514934" y="1656957"/>
-                  </a:lnTo>
-                  <a:lnTo>
-                    <a:pt x="5586557" y="1667754"/>
-                  </a:lnTo>
-                  <a:lnTo>
-                    <a:pt x="5658179" y="1678379"/>
-                  </a:lnTo>
-                  <a:lnTo>
-                    <a:pt x="5729802" y="1688834"/>
-                  </a:lnTo>
-                  <a:lnTo>
-                    <a:pt x="5801424" y="1699123"/>
-                  </a:lnTo>
-                  <a:lnTo>
-                    <a:pt x="5873047" y="1709248"/>
-                  </a:lnTo>
-                  <a:lnTo>
-                    <a:pt x="5944669" y="1719211"/>
-                  </a:lnTo>
-                  <a:lnTo>
-                    <a:pt x="6016292" y="1729016"/>
-                  </a:lnTo>
-                  <a:lnTo>
-                    <a:pt x="6087914" y="1738664"/>
-                  </a:lnTo>
-                  <a:lnTo>
-                    <a:pt x="6159537" y="1748158"/>
-                  </a:lnTo>
-                  <a:lnTo>
-                    <a:pt x="6231159" y="1757501"/>
-                  </a:lnTo>
-                  <a:lnTo>
-                    <a:pt x="6302782" y="1766696"/>
-                  </a:lnTo>
-                  <a:lnTo>
-                    <a:pt x="6374404" y="1775743"/>
-                  </a:lnTo>
-                  <a:lnTo>
-                    <a:pt x="6446027" y="1784647"/>
-                  </a:lnTo>
-                  <a:lnTo>
-                    <a:pt x="6517649" y="1793408"/>
-                  </a:lnTo>
-                  <a:lnTo>
-                    <a:pt x="6589272" y="1802030"/>
-                  </a:lnTo>
-                  <a:lnTo>
-                    <a:pt x="6660894" y="1810514"/>
-                  </a:lnTo>
-                  <a:lnTo>
-                    <a:pt x="6732517" y="1818863"/>
-                  </a:lnTo>
-                  <a:lnTo>
-                    <a:pt x="6804139" y="1827079"/>
-                  </a:lnTo>
-                  <a:lnTo>
-                    <a:pt x="6875762" y="1835164"/>
-                  </a:lnTo>
-                  <a:lnTo>
-                    <a:pt x="6947385" y="1843120"/>
-                  </a:lnTo>
-                  <a:lnTo>
-                    <a:pt x="7019007" y="1850950"/>
-                  </a:lnTo>
-                  <a:lnTo>
-                    <a:pt x="7090630" y="1858654"/>
+                    <a:pt x="71622" y="40054"/>
+                  </a:lnTo>
+                  <a:lnTo>
+                    <a:pt x="143245" y="79448"/>
+                  </a:lnTo>
+                  <a:lnTo>
+                    <a:pt x="214867" y="118191"/>
+                  </a:lnTo>
+                  <a:lnTo>
+                    <a:pt x="286490" y="156296"/>
+                  </a:lnTo>
+                  <a:lnTo>
+                    <a:pt x="358112" y="193771"/>
+                  </a:lnTo>
+                  <a:lnTo>
+                    <a:pt x="429735" y="230628"/>
+                  </a:lnTo>
+                  <a:lnTo>
+                    <a:pt x="501357" y="266876"/>
+                  </a:lnTo>
+                  <a:lnTo>
+                    <a:pt x="572980" y="302527"/>
+                  </a:lnTo>
+                  <a:lnTo>
+                    <a:pt x="644602" y="337589"/>
+                  </a:lnTo>
+                  <a:lnTo>
+                    <a:pt x="716225" y="372072"/>
+                  </a:lnTo>
+                  <a:lnTo>
+                    <a:pt x="787847" y="405986"/>
+                  </a:lnTo>
+                  <a:lnTo>
+                    <a:pt x="859470" y="439341"/>
+                  </a:lnTo>
+                  <a:lnTo>
+                    <a:pt x="931092" y="472145"/>
+                  </a:lnTo>
+                  <a:lnTo>
+                    <a:pt x="1002715" y="504408"/>
+                  </a:lnTo>
+                  <a:lnTo>
+                    <a:pt x="1074337" y="536138"/>
+                  </a:lnTo>
+                  <a:lnTo>
+                    <a:pt x="1145960" y="567345"/>
+                  </a:lnTo>
+                  <a:lnTo>
+                    <a:pt x="1217582" y="598037"/>
+                  </a:lnTo>
+                  <a:lnTo>
+                    <a:pt x="1289205" y="628222"/>
+                  </a:lnTo>
+                  <a:lnTo>
+                    <a:pt x="1360827" y="657909"/>
+                  </a:lnTo>
+                  <a:lnTo>
+                    <a:pt x="1432450" y="687106"/>
+                  </a:lnTo>
+                  <a:lnTo>
+                    <a:pt x="1504073" y="715821"/>
+                  </a:lnTo>
+                  <a:lnTo>
+                    <a:pt x="1575695" y="744063"/>
+                  </a:lnTo>
+                  <a:lnTo>
+                    <a:pt x="1647318" y="771838"/>
+                  </a:lnTo>
+                  <a:lnTo>
+                    <a:pt x="1718940" y="799155"/>
+                  </a:lnTo>
+                  <a:lnTo>
+                    <a:pt x="1790563" y="826021"/>
+                  </a:lnTo>
+                  <a:lnTo>
+                    <a:pt x="1862185" y="852444"/>
+                  </a:lnTo>
+                  <a:lnTo>
+                    <a:pt x="1933808" y="878430"/>
+                  </a:lnTo>
+                  <a:lnTo>
+                    <a:pt x="2005430" y="903988"/>
+                  </a:lnTo>
+                  <a:lnTo>
+                    <a:pt x="2077053" y="929124"/>
+                  </a:lnTo>
+                  <a:lnTo>
+                    <a:pt x="2148675" y="953845"/>
+                  </a:lnTo>
+                  <a:lnTo>
+                    <a:pt x="2220298" y="978158"/>
+                  </a:lnTo>
+                  <a:lnTo>
+                    <a:pt x="2291920" y="1002070"/>
+                  </a:lnTo>
+                  <a:lnTo>
+                    <a:pt x="2363543" y="1025588"/>
+                  </a:lnTo>
+                  <a:lnTo>
+                    <a:pt x="2435165" y="1048717"/>
+                  </a:lnTo>
+                  <a:lnTo>
+                    <a:pt x="2506788" y="1071464"/>
+                  </a:lnTo>
+                  <a:lnTo>
+                    <a:pt x="2578410" y="1093837"/>
+                  </a:lnTo>
+                  <a:lnTo>
+                    <a:pt x="2650033" y="1115839"/>
+                  </a:lnTo>
+                  <a:lnTo>
+                    <a:pt x="2721655" y="1137479"/>
+                  </a:lnTo>
+                  <a:lnTo>
+                    <a:pt x="2793278" y="1158762"/>
+                  </a:lnTo>
+                  <a:lnTo>
+                    <a:pt x="2864901" y="1179693"/>
+                  </a:lnTo>
+                  <a:lnTo>
+                    <a:pt x="2936523" y="1200279"/>
+                  </a:lnTo>
+                  <a:lnTo>
+                    <a:pt x="3008146" y="1220526"/>
+                  </a:lnTo>
+                  <a:lnTo>
+                    <a:pt x="3079768" y="1240438"/>
+                  </a:lnTo>
+                  <a:lnTo>
+                    <a:pt x="3151391" y="1260021"/>
+                  </a:lnTo>
+                  <a:lnTo>
+                    <a:pt x="3223013" y="1279281"/>
+                  </a:lnTo>
+                  <a:lnTo>
+                    <a:pt x="3294636" y="1298224"/>
+                  </a:lnTo>
+                  <a:lnTo>
+                    <a:pt x="3366258" y="1316854"/>
+                  </a:lnTo>
+                  <a:lnTo>
+                    <a:pt x="3437881" y="1335176"/>
+                  </a:lnTo>
+                  <a:lnTo>
+                    <a:pt x="3509503" y="1353196"/>
+                  </a:lnTo>
+                  <a:lnTo>
+                    <a:pt x="3581126" y="1370919"/>
+                  </a:lnTo>
+                  <a:lnTo>
+                    <a:pt x="3652748" y="1388349"/>
+                  </a:lnTo>
+                  <a:lnTo>
+                    <a:pt x="3724371" y="1405492"/>
+                  </a:lnTo>
+                  <a:lnTo>
+                    <a:pt x="3795993" y="1422351"/>
+                  </a:lnTo>
+                  <a:lnTo>
+                    <a:pt x="3867616" y="1438932"/>
+                  </a:lnTo>
+                  <a:lnTo>
+                    <a:pt x="3939238" y="1455240"/>
+                  </a:lnTo>
+                  <a:lnTo>
+                    <a:pt x="4010861" y="1471279"/>
+                  </a:lnTo>
+                  <a:lnTo>
+                    <a:pt x="4082483" y="1487053"/>
+                  </a:lnTo>
+                  <a:lnTo>
+                    <a:pt x="4154106" y="1502566"/>
+                  </a:lnTo>
+                  <a:lnTo>
+                    <a:pt x="4225729" y="1517824"/>
+                  </a:lnTo>
+                  <a:lnTo>
+                    <a:pt x="4297351" y="1532830"/>
+                  </a:lnTo>
+                  <a:lnTo>
+                    <a:pt x="4368974" y="1547588"/>
+                  </a:lnTo>
+                  <a:lnTo>
+                    <a:pt x="4440596" y="1562102"/>
+                  </a:lnTo>
+                  <a:lnTo>
+                    <a:pt x="4512219" y="1576377"/>
+                  </a:lnTo>
+                  <a:lnTo>
+                    <a:pt x="4583841" y="1590417"/>
+                  </a:lnTo>
+                  <a:lnTo>
+                    <a:pt x="4655464" y="1604224"/>
+                  </a:lnTo>
+                  <a:lnTo>
+                    <a:pt x="4727086" y="1617804"/>
+                  </a:lnTo>
+                  <a:lnTo>
+                    <a:pt x="4798709" y="1631160"/>
+                  </a:lnTo>
+                  <a:lnTo>
+                    <a:pt x="4870331" y="1644295"/>
+                  </a:lnTo>
+                  <a:lnTo>
+                    <a:pt x="4941954" y="1657214"/>
+                  </a:lnTo>
+                  <a:lnTo>
+                    <a:pt x="5013576" y="1669919"/>
+                  </a:lnTo>
+                  <a:lnTo>
+                    <a:pt x="5085199" y="1682415"/>
+                  </a:lnTo>
+                  <a:lnTo>
+                    <a:pt x="5156821" y="1694705"/>
+                  </a:lnTo>
+                  <a:lnTo>
+                    <a:pt x="5228444" y="1706791"/>
+                  </a:lnTo>
+                  <a:lnTo>
+                    <a:pt x="5300066" y="1718678"/>
+                  </a:lnTo>
+                  <a:lnTo>
+                    <a:pt x="5371689" y="1730369"/>
+                  </a:lnTo>
+                  <a:lnTo>
+                    <a:pt x="5443311" y="1741867"/>
+                  </a:lnTo>
+                  <a:lnTo>
+                    <a:pt x="5514934" y="1753176"/>
+                  </a:lnTo>
+                  <a:lnTo>
+                    <a:pt x="5586557" y="1764297"/>
+                  </a:lnTo>
+                  <a:lnTo>
+                    <a:pt x="5658179" y="1775236"/>
+                  </a:lnTo>
+                  <a:lnTo>
+                    <a:pt x="5729802" y="1785993"/>
+                  </a:lnTo>
+                  <a:lnTo>
+                    <a:pt x="5801424" y="1796573"/>
+                  </a:lnTo>
+                  <a:lnTo>
+                    <a:pt x="5873047" y="1806979"/>
+                  </a:lnTo>
+                  <a:lnTo>
+                    <a:pt x="5944669" y="1817213"/>
+                  </a:lnTo>
+                  <a:lnTo>
+                    <a:pt x="6016292" y="1827278"/>
+                  </a:lnTo>
+                  <a:lnTo>
+                    <a:pt x="6087914" y="1837176"/>
+                  </a:lnTo>
+                  <a:lnTo>
+                    <a:pt x="6159537" y="1846912"/>
+                  </a:lnTo>
+                  <a:lnTo>
+                    <a:pt x="6231159" y="1856487"/>
+                  </a:lnTo>
+                  <a:lnTo>
+                    <a:pt x="6302782" y="1865903"/>
+                  </a:lnTo>
+                  <a:lnTo>
+                    <a:pt x="6374404" y="1875165"/>
+                  </a:lnTo>
+                  <a:lnTo>
+                    <a:pt x="6446027" y="1884273"/>
+                  </a:lnTo>
+                  <a:lnTo>
+                    <a:pt x="6517649" y="1893231"/>
+                  </a:lnTo>
+                  <a:lnTo>
+                    <a:pt x="6589272" y="1902042"/>
+                  </a:lnTo>
+                  <a:lnTo>
+                    <a:pt x="6660894" y="1910707"/>
+                  </a:lnTo>
+                  <a:lnTo>
+                    <a:pt x="6732517" y="1919228"/>
+                  </a:lnTo>
+                  <a:lnTo>
+                    <a:pt x="6804139" y="1927610"/>
+                  </a:lnTo>
+                  <a:lnTo>
+                    <a:pt x="6875762" y="1935853"/>
+                  </a:lnTo>
+                  <a:lnTo>
+                    <a:pt x="6947385" y="1943960"/>
+                  </a:lnTo>
+                  <a:lnTo>
+                    <a:pt x="7019007" y="1951933"/>
+                  </a:lnTo>
+                  <a:lnTo>
+                    <a:pt x="7090630" y="1959774"/>
                   </a:lnTo>
                 </a:path>
               </a:pathLst>
@@ -4538,7 +4526,7 @@
           </p:nvSpPr>
           <p:spPr>
             <a:xfrm>
-              <a:off x="5783789" y="2073503"/>
+              <a:off x="5793129" y="2073503"/>
               <a:ext cx="0" cy="3649639"/>
             </a:xfrm>
             <a:custGeom>
@@ -4581,7 +4569,7 @@
           </p:nvSpPr>
           <p:spPr>
             <a:xfrm>
-              <a:off x="4658599" y="2073503"/>
+              <a:off x="4667548" y="2073503"/>
               <a:ext cx="0" cy="3649639"/>
             </a:xfrm>
             <a:custGeom>
@@ -4624,7 +4612,7 @@
           </p:nvSpPr>
           <p:spPr>
             <a:xfrm>
-              <a:off x="6864197" y="2073503"/>
+              <a:off x="6868063" y="2073503"/>
               <a:ext cx="0" cy="3649639"/>
             </a:xfrm>
             <a:custGeom>
@@ -4897,7 +4885,7 @@
           </p:nvSpPr>
           <p:spPr>
             <a:xfrm>
-              <a:off x="3120823" y="5785772"/>
+              <a:off x="3120990" y="5785772"/>
               <a:ext cx="161574" cy="80101"/>
             </a:xfrm>
             <a:prstGeom prst="rect">
@@ -4943,7 +4931,7 @@
           </p:nvSpPr>
           <p:spPr>
             <a:xfrm>
-              <a:off x="5688698" y="5785772"/>
+              <a:off x="5688107" y="5785772"/>
               <a:ext cx="62179" cy="80101"/>
             </a:xfrm>
             <a:prstGeom prst="rect">
@@ -4989,7 +4977,7 @@
           </p:nvSpPr>
           <p:spPr>
             <a:xfrm>
-              <a:off x="8175787" y="5785772"/>
+              <a:off x="8174437" y="5785772"/>
               <a:ext cx="124358" cy="80101"/>
             </a:xfrm>
             <a:prstGeom prst="rect">
@@ -5160,7 +5148,7 @@
                   <a:latin typeface="Helvetica"/>
                   <a:cs typeface="Helvetica"/>
                 </a:rPr>
-                <a:t>subHR per 10 mL/min decline: 1.25 (1.11-1.42), p_Bonf = 0.002 (n = 6)  |  per IQR decline (Δ = 21.9): 1.64 (1.25-2.15)  |  IQR: [-10.5, 11.4]</a:t>
+                <a:t>subHR per 10 mL/min decline: 1.26 (1.12-1.43), p_Bonf = 0.001 (n = 6)  |  per IQR decline (Δ = 21.9): 1.67 (1.27-2.18)  |  IQR: [-10.4, 11.4]</a:t>
               </a:r>
             </a:p>
           </p:txBody>
